--- a/Docs/MotorScoring_Arquitectura_Distribuida.pptx
+++ b/Docs/MotorScoring_Arquitectura_Distribuida.pptx
@@ -4,6 +4,9 @@
   <p:sldMasterIdLst>
     <p:sldMasterId id="2147483648" r:id="rId1"/>
   </p:sldMasterIdLst>
+  <p:notesMasterIdLst>
+    <p:notesMasterId r:id="rId15"/>
+  </p:notesMasterIdLst>
   <p:sldIdLst>
     <p:sldId id="256" r:id="rId2"/>
     <p:sldId id="257" r:id="rId3"/>
@@ -19,10 +22,7 @@
     <p:sldId id="267" r:id="rId13"/>
     <p:sldId id="268" r:id="rId14"/>
   </p:sldIdLst>
-  <p:notesMasterIdLst>
-    <p:notesMasterId r:id="rId15"/>
-  </p:notesMasterIdLst>
-  <p:sldSz cx="9144000" cy="5143500"/>
+  <p:sldSz cx="9144000" cy="5143500" type="screen16x9"/>
   <p:notesSz cx="5143500" cy="9144000"/>
   <p:defaultTextStyle>
     <a:lvl1pPr marL="0" algn="l" defTabSz="914400" rtl="0" eaLnBrk="1" latinLnBrk="0" hangingPunct="1">
@@ -116,6 +116,11 @@
       </a:defRPr>
     </a:lvl9pPr>
   </p:defaultTextStyle>
+  <p:extLst>
+    <p:ext uri="{EFAFB233-063F-42B5-8137-9DF3F51BA10A}">
+      <p15:sldGuideLst xmlns:p15="http://schemas.microsoft.com/office/powerpoint/2012/main"/>
+    </p:ext>
+  </p:extLst>
 </p:presentation>
 </file>
 
@@ -141,234 +146,10 @@
           <a:chExt cx="0" cy="0"/>
         </a:xfrm>
       </p:grpSpPr>
-      <p:sp>
-        <p:nvSpPr>
-          <p:cNvPr id="2" name="Header Placeholder 1"/>
-          <p:cNvSpPr>
-            <a:spLocks noGrp="1"/>
-          </p:cNvSpPr>
-          <p:nvPr>
-            <p:ph type="hdr" sz="quarter"/>
-          </p:nvPr>
-        </p:nvSpPr>
-        <p:spPr>
-          <a:xfrm>
-            <a:off x="0" y="0"/>
-            <a:ext cx="2971800" cy="458788"/>
-          </a:xfrm>
-          <a:prstGeom prst="rect">
-            <a:avLst/>
-          </a:prstGeom>
-        </p:spPr>
-        <p:txBody>
-          <a:bodyPr vert="horz" lIns="91440" tIns="45720" rIns="91440" bIns="45720" rtlCol="0"/>
-          <a:lstStyle>
-            <a:lvl1pPr algn="l">
-              <a:defRPr sz="1200"/>
-            </a:lvl1pPr>
-          </a:lstStyle>
-          <a:p>
-            <a:endParaRPr lang="en-US"/>
-          </a:p>
-        </p:txBody>
-      </p:sp>
-      <p:sp>
-        <p:nvSpPr>
-          <p:cNvPr id="3" name="Date Placeholder 2"/>
-          <p:cNvSpPr>
-            <a:spLocks noGrp="1"/>
-          </p:cNvSpPr>
-          <p:nvPr>
-            <p:ph type="dt" idx="1"/>
-          </p:nvPr>
-        </p:nvSpPr>
-        <p:spPr>
-          <a:xfrm>
-            <a:off x="3884613" y="0"/>
-            <a:ext cx="2971800" cy="458788"/>
-          </a:xfrm>
-          <a:prstGeom prst="rect">
-            <a:avLst/>
-          </a:prstGeom>
-        </p:spPr>
-        <p:txBody>
-          <a:bodyPr vert="horz" lIns="91440" tIns="45720" rIns="91440" bIns="45720" rtlCol="0"/>
-          <a:lstStyle>
-            <a:lvl1pPr algn="r">
-              <a:defRPr sz="1200"/>
-            </a:lvl1pPr>
-          </a:lstStyle>
-          <a:p>
-            <a:fld id="{5282F153-3F37-0F45-9E97-73ACFA13230C}" type="datetimeFigureOut">
-              <a:rPr lang="en-US"/>
-              <a:t>7/23/19</a:t>
-            </a:fld>
-            <a:endParaRPr lang="en-US"/>
-          </a:p>
-        </p:txBody>
-      </p:sp>
-      <p:sp>
-        <p:nvSpPr>
-          <p:cNvPr id="4" name="Slide Image Placeholder 3"/>
-          <p:cNvSpPr>
-            <a:spLocks noGrp="1" noRot="1" noChangeAspect="1"/>
-          </p:cNvSpPr>
-          <p:nvPr>
-            <p:ph type="sldImg" idx="2"/>
-          </p:nvPr>
-        </p:nvSpPr>
-        <p:spPr>
-          <a:xfrm>
-            <a:off x="685800" y="1143000"/>
-            <a:ext cx="5486400" cy="3086100"/>
-          </a:xfrm>
-          <a:prstGeom prst="rect">
-            <a:avLst/>
-          </a:prstGeom>
-          <a:noFill/>
-          <a:ln w="12700">
-            <a:solidFill>
-              <a:prstClr val="black"/>
-            </a:solidFill>
-          </a:ln>
-        </p:spPr>
-        <p:txBody>
-          <a:bodyPr vert="horz" lIns="91440" tIns="45720" rIns="91440" bIns="45720" rtlCol="0" anchor="ctr"/>
-          <a:lstStyle/>
-          <a:p>
-            <a:endParaRPr lang="en-US"/>
-          </a:p>
-        </p:txBody>
-      </p:sp>
-      <p:sp>
-        <p:nvSpPr>
-          <p:cNvPr id="5" name="Notes Placeholder 4"/>
-          <p:cNvSpPr>
-            <a:spLocks noGrp="1"/>
-          </p:cNvSpPr>
-          <p:nvPr>
-            <p:ph type="body" sz="quarter" idx="3"/>
-          </p:nvPr>
-        </p:nvSpPr>
-        <p:spPr>
-          <a:xfrm>
-            <a:off x="685800" y="4400550"/>
-            <a:ext cx="5486400" cy="3600450"/>
-          </a:xfrm>
-          <a:prstGeom prst="rect">
-            <a:avLst/>
-          </a:prstGeom>
-        </p:spPr>
-        <p:txBody>
-          <a:bodyPr vert="horz" lIns="91440" tIns="45720" rIns="91440" bIns="45720" rtlCol="0"/>
-          <a:lstStyle/>
-          <a:p>
-            <a:pPr lvl="0"/>
-            <a:r>
-              <a:rPr lang="en-US"/>
-              <a:t>Click to edit Master text styles</a:t>
-            </a:r>
-          </a:p>
-          <a:p>
-            <a:pPr lvl="1"/>
-            <a:r>
-              <a:rPr lang="en-US"/>
-              <a:t>Second level</a:t>
-            </a:r>
-          </a:p>
-          <a:p>
-            <a:pPr lvl="2"/>
-            <a:r>
-              <a:rPr lang="en-US"/>
-              <a:t>Third level</a:t>
-            </a:r>
-          </a:p>
-          <a:p>
-            <a:pPr lvl="3"/>
-            <a:r>
-              <a:rPr lang="en-US"/>
-              <a:t>Fourth level</a:t>
-            </a:r>
-          </a:p>
-          <a:p>
-            <a:pPr lvl="4"/>
-            <a:r>
-              <a:rPr lang="en-US"/>
-              <a:t>Fifth level</a:t>
-            </a:r>
-          </a:p>
-        </p:txBody>
-      </p:sp>
-      <p:sp>
-        <p:nvSpPr>
-          <p:cNvPr id="6" name="Footer Placeholder 5"/>
-          <p:cNvSpPr>
-            <a:spLocks noGrp="1"/>
-          </p:cNvSpPr>
-          <p:nvPr>
-            <p:ph type="ftr" sz="quarter" idx="4"/>
-          </p:nvPr>
-        </p:nvSpPr>
-        <p:spPr>
-          <a:xfrm>
-            <a:off x="0" y="8685213"/>
-            <a:ext cx="2971800" cy="458787"/>
-          </a:xfrm>
-          <a:prstGeom prst="rect">
-            <a:avLst/>
-          </a:prstGeom>
-        </p:spPr>
-        <p:txBody>
-          <a:bodyPr vert="horz" lIns="91440" tIns="45720" rIns="91440" bIns="45720" rtlCol="0" anchor="b"/>
-          <a:lstStyle>
-            <a:lvl1pPr algn="l">
-              <a:defRPr sz="1200"/>
-            </a:lvl1pPr>
-          </a:lstStyle>
-          <a:p>
-            <a:endParaRPr lang="en-US"/>
-          </a:p>
-        </p:txBody>
-      </p:sp>
-      <p:sp>
-        <p:nvSpPr>
-          <p:cNvPr id="7" name="Slide Number Placeholder 6"/>
-          <p:cNvSpPr>
-            <a:spLocks noGrp="1"/>
-          </p:cNvSpPr>
-          <p:nvPr>
-            <p:ph type="sldNum" sz="quarter" idx="5"/>
-          </p:nvPr>
-        </p:nvSpPr>
-        <p:spPr>
-          <a:xfrm>
-            <a:off x="3884613" y="8685213"/>
-            <a:ext cx="2971800" cy="458787"/>
-          </a:xfrm>
-          <a:prstGeom prst="rect">
-            <a:avLst/>
-          </a:prstGeom>
-        </p:spPr>
-        <p:txBody>
-          <a:bodyPr vert="horz" lIns="91440" tIns="45720" rIns="91440" bIns="45720" rtlCol="0" anchor="b"/>
-          <a:lstStyle>
-            <a:lvl1pPr algn="r">
-              <a:defRPr sz="1200"/>
-            </a:lvl1pPr>
-          </a:lstStyle>
-          <a:p>
-            <a:fld id="{CE5E9CC1-C706-0F49-92D6-E571CC5EEA8F}" type="slidenum">
-              <a:rPr lang="en-US"/>
-              <a:t>‹#›</a:t>
-            </a:fld>
-            <a:endParaRPr lang="en-US"/>
-          </a:p>
-        </p:txBody>
-      </p:sp>
     </p:spTree>
     <p:extLst>
       <p:ext uri="{BB962C8B-B14F-4D97-AF65-F5344CB8AC3E}">
-        <p14:creationId xmlns:p14="http://schemas.microsoft.com/office/powerpoint/2010/main" val="1024086991"/>
+        <p14:creationId xmlns:p14="http://schemas.microsoft.com/office/powerpoint/2010/main" val="1207556860"/>
       </p:ext>
     </p:extLst>
   </p:cSld>
@@ -496,6 +277,13 @@
           </p:nvPr>
         </p:nvSpPr>
         <p:spPr/>
+        <p:txBody>
+          <a:bodyPr/>
+          <a:lstStyle/>
+          <a:p>
+            <a:endParaRPr lang="es-PE"/>
+          </a:p>
+        </p:txBody>
       </p:sp>
       <p:sp>
         <p:nvSpPr>
@@ -512,10 +300,6 @@
           <a:bodyPr/>
           <a:lstStyle/>
           <a:p>
-            <a:r>
-              <a:rPr lang="en-US" dirty="0"/>
-              <a:t/>
-            </a:r>
             <a:endParaRPr lang="en-US" dirty="0"/>
           </a:p>
         </p:txBody>
@@ -584,6 +368,13 @@
           </p:nvPr>
         </p:nvSpPr>
         <p:spPr/>
+        <p:txBody>
+          <a:bodyPr/>
+          <a:lstStyle/>
+          <a:p>
+            <a:endParaRPr lang="es-PE"/>
+          </a:p>
+        </p:txBody>
       </p:sp>
       <p:sp>
         <p:nvSpPr>
@@ -600,10 +391,6 @@
           <a:bodyPr/>
           <a:lstStyle/>
           <a:p>
-            <a:r>
-              <a:rPr lang="en-US" dirty="0"/>
-              <a:t/>
-            </a:r>
             <a:endParaRPr lang="en-US" dirty="0"/>
           </a:p>
         </p:txBody>
@@ -672,6 +459,13 @@
           </p:nvPr>
         </p:nvSpPr>
         <p:spPr/>
+        <p:txBody>
+          <a:bodyPr/>
+          <a:lstStyle/>
+          <a:p>
+            <a:endParaRPr lang="es-PE"/>
+          </a:p>
+        </p:txBody>
       </p:sp>
       <p:sp>
         <p:nvSpPr>
@@ -688,10 +482,6 @@
           <a:bodyPr/>
           <a:lstStyle/>
           <a:p>
-            <a:r>
-              <a:rPr lang="en-US" dirty="0"/>
-              <a:t/>
-            </a:r>
             <a:endParaRPr lang="en-US" dirty="0"/>
           </a:p>
         </p:txBody>
@@ -760,6 +550,13 @@
           </p:nvPr>
         </p:nvSpPr>
         <p:spPr/>
+        <p:txBody>
+          <a:bodyPr/>
+          <a:lstStyle/>
+          <a:p>
+            <a:endParaRPr lang="es-PE"/>
+          </a:p>
+        </p:txBody>
       </p:sp>
       <p:sp>
         <p:nvSpPr>
@@ -776,10 +573,6 @@
           <a:bodyPr/>
           <a:lstStyle/>
           <a:p>
-            <a:r>
-              <a:rPr lang="en-US" dirty="0"/>
-              <a:t/>
-            </a:r>
             <a:endParaRPr lang="en-US" dirty="0"/>
           </a:p>
         </p:txBody>
@@ -848,6 +641,13 @@
           </p:nvPr>
         </p:nvSpPr>
         <p:spPr/>
+        <p:txBody>
+          <a:bodyPr/>
+          <a:lstStyle/>
+          <a:p>
+            <a:endParaRPr lang="es-PE"/>
+          </a:p>
+        </p:txBody>
       </p:sp>
       <p:sp>
         <p:nvSpPr>
@@ -864,10 +664,6 @@
           <a:bodyPr/>
           <a:lstStyle/>
           <a:p>
-            <a:r>
-              <a:rPr lang="en-US" dirty="0"/>
-              <a:t/>
-            </a:r>
             <a:endParaRPr lang="en-US" dirty="0"/>
           </a:p>
         </p:txBody>
@@ -936,6 +732,13 @@
           </p:nvPr>
         </p:nvSpPr>
         <p:spPr/>
+        <p:txBody>
+          <a:bodyPr/>
+          <a:lstStyle/>
+          <a:p>
+            <a:endParaRPr lang="es-PE"/>
+          </a:p>
+        </p:txBody>
       </p:sp>
       <p:sp>
         <p:nvSpPr>
@@ -952,10 +755,6 @@
           <a:bodyPr/>
           <a:lstStyle/>
           <a:p>
-            <a:r>
-              <a:rPr lang="en-US" dirty="0"/>
-              <a:t/>
-            </a:r>
             <a:endParaRPr lang="en-US" dirty="0"/>
           </a:p>
         </p:txBody>
@@ -1024,6 +823,13 @@
           </p:nvPr>
         </p:nvSpPr>
         <p:spPr/>
+        <p:txBody>
+          <a:bodyPr/>
+          <a:lstStyle/>
+          <a:p>
+            <a:endParaRPr lang="es-PE"/>
+          </a:p>
+        </p:txBody>
       </p:sp>
       <p:sp>
         <p:nvSpPr>
@@ -1040,10 +846,6 @@
           <a:bodyPr/>
           <a:lstStyle/>
           <a:p>
-            <a:r>
-              <a:rPr lang="en-US" dirty="0"/>
-              <a:t/>
-            </a:r>
             <a:endParaRPr lang="en-US" dirty="0"/>
           </a:p>
         </p:txBody>
@@ -1112,6 +914,13 @@
           </p:nvPr>
         </p:nvSpPr>
         <p:spPr/>
+        <p:txBody>
+          <a:bodyPr/>
+          <a:lstStyle/>
+          <a:p>
+            <a:endParaRPr lang="es-PE"/>
+          </a:p>
+        </p:txBody>
       </p:sp>
       <p:sp>
         <p:nvSpPr>
@@ -1128,10 +937,6 @@
           <a:bodyPr/>
           <a:lstStyle/>
           <a:p>
-            <a:r>
-              <a:rPr lang="en-US" dirty="0"/>
-              <a:t/>
-            </a:r>
             <a:endParaRPr lang="en-US" dirty="0"/>
           </a:p>
         </p:txBody>
@@ -1200,6 +1005,13 @@
           </p:nvPr>
         </p:nvSpPr>
         <p:spPr/>
+        <p:txBody>
+          <a:bodyPr/>
+          <a:lstStyle/>
+          <a:p>
+            <a:endParaRPr lang="es-PE"/>
+          </a:p>
+        </p:txBody>
       </p:sp>
       <p:sp>
         <p:nvSpPr>
@@ -1216,10 +1028,6 @@
           <a:bodyPr/>
           <a:lstStyle/>
           <a:p>
-            <a:r>
-              <a:rPr lang="en-US" dirty="0"/>
-              <a:t/>
-            </a:r>
             <a:endParaRPr lang="en-US" dirty="0"/>
           </a:p>
         </p:txBody>
@@ -1288,6 +1096,13 @@
           </p:nvPr>
         </p:nvSpPr>
         <p:spPr/>
+        <p:txBody>
+          <a:bodyPr/>
+          <a:lstStyle/>
+          <a:p>
+            <a:endParaRPr lang="es-PE"/>
+          </a:p>
+        </p:txBody>
       </p:sp>
       <p:sp>
         <p:nvSpPr>
@@ -1304,10 +1119,6 @@
           <a:bodyPr/>
           <a:lstStyle/>
           <a:p>
-            <a:r>
-              <a:rPr lang="en-US" dirty="0"/>
-              <a:t/>
-            </a:r>
             <a:endParaRPr lang="en-US" dirty="0"/>
           </a:p>
         </p:txBody>
@@ -1376,6 +1187,13 @@
           </p:nvPr>
         </p:nvSpPr>
         <p:spPr/>
+        <p:txBody>
+          <a:bodyPr/>
+          <a:lstStyle/>
+          <a:p>
+            <a:endParaRPr lang="es-PE"/>
+          </a:p>
+        </p:txBody>
       </p:sp>
       <p:sp>
         <p:nvSpPr>
@@ -1392,10 +1210,6 @@
           <a:bodyPr/>
           <a:lstStyle/>
           <a:p>
-            <a:r>
-              <a:rPr lang="en-US" dirty="0"/>
-              <a:t/>
-            </a:r>
             <a:endParaRPr lang="en-US" dirty="0"/>
           </a:p>
         </p:txBody>
@@ -1464,6 +1278,13 @@
           </p:nvPr>
         </p:nvSpPr>
         <p:spPr/>
+        <p:txBody>
+          <a:bodyPr/>
+          <a:lstStyle/>
+          <a:p>
+            <a:endParaRPr lang="es-PE"/>
+          </a:p>
+        </p:txBody>
       </p:sp>
       <p:sp>
         <p:nvSpPr>
@@ -1480,10 +1301,6 @@
           <a:bodyPr/>
           <a:lstStyle/>
           <a:p>
-            <a:r>
-              <a:rPr lang="en-US" dirty="0"/>
-              <a:t/>
-            </a:r>
             <a:endParaRPr lang="en-US" dirty="0"/>
           </a:p>
         </p:txBody>
@@ -1552,6 +1369,13 @@
           </p:nvPr>
         </p:nvSpPr>
         <p:spPr/>
+        <p:txBody>
+          <a:bodyPr/>
+          <a:lstStyle/>
+          <a:p>
+            <a:endParaRPr lang="es-PE"/>
+          </a:p>
+        </p:txBody>
       </p:sp>
       <p:sp>
         <p:nvSpPr>
@@ -1568,10 +1392,6 @@
           <a:bodyPr/>
           <a:lstStyle/>
           <a:p>
-            <a:r>
-              <a:rPr lang="en-US" dirty="0"/>
-              <a:t/>
-            </a:r>
             <a:endParaRPr lang="en-US" dirty="0"/>
           </a:p>
         </p:txBody>
@@ -1645,6 +1465,11 @@
 <file path=ppt/slideMasters/slideMaster1.xml><?xml version="1.0" encoding="utf-8"?>
 <p:sldMaster xmlns:a="http://schemas.openxmlformats.org/drawingml/2006/main" xmlns:r="http://schemas.openxmlformats.org/officeDocument/2006/relationships" xmlns:p="http://schemas.openxmlformats.org/presentationml/2006/main">
   <p:cSld>
+    <p:bg>
+      <p:bgRef idx="1001">
+        <a:schemeClr val="bg1"/>
+      </p:bgRef>
+    </p:bg>
     <p:spTree>
       <p:nvGrpSpPr>
         <p:cNvPr id="1" name=""/>
@@ -1927,6 +1752,7 @@
         <a:solidFill>
           <a:srgbClr val="082F67"/>
         </a:solidFill>
+        <a:effectLst/>
       </p:bgPr>
     </p:bg>
     <p:spTree>
@@ -1964,7 +1790,7 @@
           <a:bodyPr wrap="square" lIns="0" tIns="0" rIns="0" bIns="0" rtlCol="0" anchor="t"/>
           <a:lstStyle/>
           <a:p>
-            <a:pPr indent="0" marL="0">
+            <a:pPr marL="0" indent="0">
               <a:buNone/>
             </a:pPr>
             <a:r>
@@ -2003,7 +1829,7 @@
           <a:bodyPr wrap="square" lIns="0" tIns="0" rIns="0" bIns="0" rtlCol="0" anchor="t"/>
           <a:lstStyle/>
           <a:p>
-            <a:pPr indent="0" marL="0">
+            <a:pPr marL="0" indent="0">
               <a:buNone/>
             </a:pPr>
             <a:r>
@@ -2042,7 +1868,7 @@
           <a:bodyPr wrap="square" lIns="0" tIns="0" rIns="0" bIns="0" rtlCol="0" anchor="t"/>
           <a:lstStyle/>
           <a:p>
-            <a:pPr indent="0" marL="0">
+            <a:pPr marL="0" indent="0">
               <a:buNone/>
             </a:pPr>
             <a:r>
@@ -2056,6 +1882,35 @@
               </a:rPr>
               <a:t>APIs .NET 8 · API Gateway · Identidad con MFA · Mensajería asíncrona · Observabilidad</a:t>
             </a:r>
+          </a:p>
+          <a:p>
+            <a:pPr marL="0" indent="0">
+              <a:buNone/>
+            </a:pPr>
+            <a:endParaRPr lang="en-US" sz="1400" dirty="0">
+              <a:solidFill>
+                <a:srgbClr val="FFFFFF"/>
+              </a:solidFill>
+              <a:latin typeface="Calibri" pitchFamily="34" charset="0"/>
+              <a:ea typeface="Calibri" pitchFamily="34" charset="-122"/>
+              <a:cs typeface="Calibri" pitchFamily="34" charset="-120"/>
+            </a:endParaRPr>
+          </a:p>
+          <a:p>
+            <a:pPr marL="0" indent="0">
+              <a:buNone/>
+            </a:pPr>
+            <a:r>
+              <a:rPr lang="en-US" sz="1400" dirty="0">
+                <a:solidFill>
+                  <a:srgbClr val="FFFFFF"/>
+                </a:solidFill>
+                <a:latin typeface="Calibri" pitchFamily="34" charset="0"/>
+                <a:ea typeface="Calibri" pitchFamily="34" charset="-122"/>
+                <a:cs typeface="Calibri" pitchFamily="34" charset="-120"/>
+              </a:rPr>
+              <a:t>Integrantes: José Julca</a:t>
+            </a:r>
             <a:endParaRPr lang="en-US" sz="1400" dirty="0"/>
           </a:p>
         </p:txBody>
@@ -2081,7 +1936,7 @@
           <a:bodyPr wrap="square" lIns="0" tIns="0" rIns="0" bIns="0" rtlCol="0" anchor="t"/>
           <a:lstStyle/>
           <a:p>
-            <a:pPr indent="0" marL="0">
+            <a:pPr marL="0" indent="0">
               <a:buNone/>
             </a:pPr>
             <a:r>
@@ -2123,17 +1978,24 @@
             <a:prstDash val="solid"/>
           </a:ln>
         </p:spPr>
+        <p:txBody>
+          <a:bodyPr/>
+          <a:lstStyle/>
+          <a:p>
+            <a:endParaRPr lang="es-PE"/>
+          </a:p>
+        </p:txBody>
       </p:sp>
       <p:pic>
         <p:nvPicPr>
-          <p:cNvPr id="7" name="Image 0" descr="preencoded.png">    </p:cNvPr>
+          <p:cNvPr id="7" name="Image 0" descr="preencoded.png"/>
           <p:cNvPicPr>
             <a:picLocks noChangeAspect="1"/>
           </p:cNvPicPr>
           <p:nvPr/>
         </p:nvPicPr>
         <p:blipFill>
-          <a:blip r:embed="rId1"/>
+          <a:blip r:embed="rId3"/>
           <a:stretch>
             <a:fillRect/>
           </a:stretch>
@@ -2172,17 +2034,24 @@
             <a:prstDash val="solid"/>
           </a:ln>
         </p:spPr>
+        <p:txBody>
+          <a:bodyPr/>
+          <a:lstStyle/>
+          <a:p>
+            <a:endParaRPr lang="es-PE"/>
+          </a:p>
+        </p:txBody>
       </p:sp>
       <p:pic>
         <p:nvPicPr>
-          <p:cNvPr id="9" name="Image 1" descr="preencoded.png">    </p:cNvPr>
+          <p:cNvPr id="9" name="Image 1" descr="preencoded.png"/>
           <p:cNvPicPr>
             <a:picLocks noChangeAspect="1"/>
           </p:cNvPicPr>
           <p:nvPr/>
         </p:nvPicPr>
         <p:blipFill>
-          <a:blip r:embed="rId2"/>
+          <a:blip r:embed="rId4"/>
           <a:stretch>
             <a:fillRect/>
           </a:stretch>
@@ -2221,17 +2090,24 @@
             <a:prstDash val="solid"/>
           </a:ln>
         </p:spPr>
+        <p:txBody>
+          <a:bodyPr/>
+          <a:lstStyle/>
+          <a:p>
+            <a:endParaRPr lang="es-PE"/>
+          </a:p>
+        </p:txBody>
       </p:sp>
       <p:pic>
         <p:nvPicPr>
-          <p:cNvPr id="11" name="Image 2" descr="preencoded.png">    </p:cNvPr>
+          <p:cNvPr id="11" name="Image 2" descr="preencoded.png"/>
           <p:cNvPicPr>
             <a:picLocks noChangeAspect="1"/>
           </p:cNvPicPr>
           <p:nvPr/>
         </p:nvPicPr>
         <p:blipFill>
-          <a:blip r:embed="rId3"/>
+          <a:blip r:embed="rId5"/>
           <a:stretch>
             <a:fillRect/>
           </a:stretch>
@@ -2270,17 +2146,24 @@
             <a:prstDash val="solid"/>
           </a:ln>
         </p:spPr>
+        <p:txBody>
+          <a:bodyPr/>
+          <a:lstStyle/>
+          <a:p>
+            <a:endParaRPr lang="es-PE"/>
+          </a:p>
+        </p:txBody>
       </p:sp>
       <p:pic>
         <p:nvPicPr>
-          <p:cNvPr id="13" name="Image 3" descr="preencoded.png">    </p:cNvPr>
+          <p:cNvPr id="13" name="Image 3" descr="preencoded.png"/>
           <p:cNvPicPr>
             <a:picLocks noChangeAspect="1"/>
           </p:cNvPicPr>
           <p:nvPr/>
         </p:nvPicPr>
         <p:blipFill>
-          <a:blip r:embed="rId4"/>
+          <a:blip r:embed="rId6"/>
           <a:stretch>
             <a:fillRect/>
           </a:stretch>
@@ -2311,6 +2194,7 @@
         <a:solidFill>
           <a:srgbClr val="FFFFFF"/>
         </a:solidFill>
+        <a:effectLst/>
       </p:bgPr>
     </p:bg>
     <p:spTree>
@@ -2348,7 +2232,7 @@
           <a:bodyPr wrap="square" lIns="0" tIns="0" rIns="0" bIns="0" rtlCol="0" anchor="ctr"/>
           <a:lstStyle/>
           <a:p>
-            <a:pPr indent="0" marL="0">
+            <a:pPr marL="0" indent="0">
               <a:buNone/>
             </a:pPr>
             <a:r>
@@ -2382,15 +2266,27 @@
         </p:nvGraphicFramePr>
         <p:xfrm>
           <a:off x="457200" y="1188720"/>
-          <a:ext cx="4937760" cy="914400"/>
+          <a:ext cx="4937760" cy="3520440"/>
         </p:xfrm>
         <a:graphic>
           <a:graphicData uri="http://schemas.openxmlformats.org/drawingml/2006/table">
             <a:tbl>
               <a:tblPr/>
               <a:tblGrid>
-                <a:gridCol w="3429000"/>
-                <a:gridCol w="1508760"/>
+                <a:gridCol w="3429000">
+                  <a:extLst>
+                    <a:ext uri="{9D8B030D-6E8A-4147-A177-3AD203B41FA5}">
+                      <a16:colId xmlns:a16="http://schemas.microsoft.com/office/drawing/2014/main" val="20000"/>
+                    </a:ext>
+                  </a:extLst>
+                </a:gridCol>
+                <a:gridCol w="1508760">
+                  <a:extLst>
+                    <a:ext uri="{9D8B030D-6E8A-4147-A177-3AD203B41FA5}">
+                      <a16:colId xmlns:a16="http://schemas.microsoft.com/office/drawing/2014/main" val="20001"/>
+                    </a:ext>
+                  </a:extLst>
+                </a:gridCol>
               </a:tblGrid>
               <a:tr h="320040">
                 <a:tc>
@@ -2398,7 +2294,7 @@
                     <a:bodyPr/>
                     <a:lstStyle/>
                     <a:p>
-                      <a:pPr indent="0" marL="0">
+                      <a:pPr marL="0" indent="0">
                         <a:buNone/>
                       </a:pPr>
                       <a:r>
@@ -2419,7 +2315,7 @@
                       </a:endParaRPr>
                     </a:p>
                   </a:txBody>
-                  <a:tcPr marL="91440" marR="91440" marT="0" marB="0" anchor="ctr">
+                  <a:tcPr marT="0" marB="0" anchor="ctr">
                     <a:lnL w="19050" cap="flat" cmpd="sng" algn="ctr">
                       <a:solidFill>
                         <a:srgbClr val="FFFFFF"/>
@@ -2466,7 +2362,7 @@
                     <a:bodyPr/>
                     <a:lstStyle/>
                     <a:p>
-                      <a:pPr indent="0" marL="0">
+                      <a:pPr marL="0" indent="0">
                         <a:buNone/>
                       </a:pPr>
                       <a:r>
@@ -2487,7 +2383,7 @@
                       </a:endParaRPr>
                     </a:p>
                   </a:txBody>
-                  <a:tcPr marL="91440" marR="91440" marT="0" marB="0" anchor="ctr">
+                  <a:tcPr marT="0" marB="0" anchor="ctr">
                     <a:lnL w="19050" cap="flat" cmpd="sng" algn="ctr">
                       <a:solidFill>
                         <a:srgbClr val="FFFFFF"/>
@@ -2529,6 +2425,11 @@
                     </a:solidFill>
                   </a:tcPr>
                 </a:tc>
+                <a:extLst>
+                  <a:ext uri="{0D108BD9-81ED-4DB2-BD59-A6C34878D82A}">
+                    <a16:rowId xmlns:a16="http://schemas.microsoft.com/office/drawing/2014/main" val="10000"/>
+                  </a:ext>
+                </a:extLst>
               </a:tr>
               <a:tr h="320040">
                 <a:tc>
@@ -2536,7 +2437,7 @@
                     <a:bodyPr/>
                     <a:lstStyle/>
                     <a:p>
-                      <a:pPr indent="0" marL="0">
+                      <a:pPr marL="0" indent="0">
                         <a:buNone/>
                       </a:pPr>
                       <a:r>
@@ -2557,7 +2458,7 @@
                       </a:endParaRPr>
                     </a:p>
                   </a:txBody>
-                  <a:tcPr marL="91440" marR="91440" marT="0" marB="0" anchor="ctr">
+                  <a:tcPr marT="0" marB="0" anchor="ctr">
                     <a:lnL w="19050" cap="flat" cmpd="sng" algn="ctr">
                       <a:solidFill>
                         <a:srgbClr val="FFFFFF"/>
@@ -2604,7 +2505,7 @@
                     <a:bodyPr/>
                     <a:lstStyle/>
                     <a:p>
-                      <a:pPr indent="0" marL="0">
+                      <a:pPr marL="0" indent="0">
                         <a:buNone/>
                       </a:pPr>
                       <a:r>
@@ -2625,7 +2526,7 @@
                       </a:endParaRPr>
                     </a:p>
                   </a:txBody>
-                  <a:tcPr marL="91440" marR="91440" marT="0" marB="0" anchor="ctr">
+                  <a:tcPr marT="0" marB="0" anchor="ctr">
                     <a:lnL w="19050" cap="flat" cmpd="sng" algn="ctr">
                       <a:solidFill>
                         <a:srgbClr val="FFFFFF"/>
@@ -2667,6 +2568,11 @@
                     </a:solidFill>
                   </a:tcPr>
                 </a:tc>
+                <a:extLst>
+                  <a:ext uri="{0D108BD9-81ED-4DB2-BD59-A6C34878D82A}">
+                    <a16:rowId xmlns:a16="http://schemas.microsoft.com/office/drawing/2014/main" val="10001"/>
+                  </a:ext>
+                </a:extLst>
               </a:tr>
               <a:tr h="320040">
                 <a:tc>
@@ -2674,7 +2580,7 @@
                     <a:bodyPr/>
                     <a:lstStyle/>
                     <a:p>
-                      <a:pPr indent="0" marL="0">
+                      <a:pPr marL="0" indent="0">
                         <a:buNone/>
                       </a:pPr>
                       <a:r>
@@ -2695,7 +2601,7 @@
                       </a:endParaRPr>
                     </a:p>
                   </a:txBody>
-                  <a:tcPr marL="91440" marR="91440" marT="0" marB="0" anchor="ctr">
+                  <a:tcPr marT="0" marB="0" anchor="ctr">
                     <a:lnL w="19050" cap="flat" cmpd="sng" algn="ctr">
                       <a:solidFill>
                         <a:srgbClr val="FFFFFF"/>
@@ -2742,7 +2648,7 @@
                     <a:bodyPr/>
                     <a:lstStyle/>
                     <a:p>
-                      <a:pPr indent="0" marL="0">
+                      <a:pPr marL="0" indent="0">
                         <a:buNone/>
                       </a:pPr>
                       <a:r>
@@ -2763,7 +2669,7 @@
                       </a:endParaRPr>
                     </a:p>
                   </a:txBody>
-                  <a:tcPr marL="91440" marR="91440" marT="0" marB="0" anchor="ctr">
+                  <a:tcPr marT="0" marB="0" anchor="ctr">
                     <a:lnL w="19050" cap="flat" cmpd="sng" algn="ctr">
                       <a:solidFill>
                         <a:srgbClr val="FFFFFF"/>
@@ -2805,6 +2711,11 @@
                     </a:solidFill>
                   </a:tcPr>
                 </a:tc>
+                <a:extLst>
+                  <a:ext uri="{0D108BD9-81ED-4DB2-BD59-A6C34878D82A}">
+                    <a16:rowId xmlns:a16="http://schemas.microsoft.com/office/drawing/2014/main" val="10002"/>
+                  </a:ext>
+                </a:extLst>
               </a:tr>
               <a:tr h="320040">
                 <a:tc>
@@ -2812,7 +2723,7 @@
                     <a:bodyPr/>
                     <a:lstStyle/>
                     <a:p>
-                      <a:pPr indent="0" marL="0">
+                      <a:pPr marL="0" indent="0">
                         <a:buNone/>
                       </a:pPr>
                       <a:r>
@@ -2833,7 +2744,7 @@
                       </a:endParaRPr>
                     </a:p>
                   </a:txBody>
-                  <a:tcPr marL="91440" marR="91440" marT="0" marB="0" anchor="ctr">
+                  <a:tcPr marT="0" marB="0" anchor="ctr">
                     <a:lnL w="19050" cap="flat" cmpd="sng" algn="ctr">
                       <a:solidFill>
                         <a:srgbClr val="FFFFFF"/>
@@ -2880,7 +2791,7 @@
                     <a:bodyPr/>
                     <a:lstStyle/>
                     <a:p>
-                      <a:pPr indent="0" marL="0">
+                      <a:pPr marL="0" indent="0">
                         <a:buNone/>
                       </a:pPr>
                       <a:r>
@@ -2901,7 +2812,7 @@
                       </a:endParaRPr>
                     </a:p>
                   </a:txBody>
-                  <a:tcPr marL="91440" marR="91440" marT="0" marB="0" anchor="ctr">
+                  <a:tcPr marT="0" marB="0" anchor="ctr">
                     <a:lnL w="19050" cap="flat" cmpd="sng" algn="ctr">
                       <a:solidFill>
                         <a:srgbClr val="FFFFFF"/>
@@ -2943,6 +2854,11 @@
                     </a:solidFill>
                   </a:tcPr>
                 </a:tc>
+                <a:extLst>
+                  <a:ext uri="{0D108BD9-81ED-4DB2-BD59-A6C34878D82A}">
+                    <a16:rowId xmlns:a16="http://schemas.microsoft.com/office/drawing/2014/main" val="10003"/>
+                  </a:ext>
+                </a:extLst>
               </a:tr>
               <a:tr h="320040">
                 <a:tc>
@@ -2950,7 +2866,7 @@
                     <a:bodyPr/>
                     <a:lstStyle/>
                     <a:p>
-                      <a:pPr indent="0" marL="0">
+                      <a:pPr marL="0" indent="0">
                         <a:buNone/>
                       </a:pPr>
                       <a:r>
@@ -2971,7 +2887,7 @@
                       </a:endParaRPr>
                     </a:p>
                   </a:txBody>
-                  <a:tcPr marL="91440" marR="91440" marT="0" marB="0" anchor="ctr">
+                  <a:tcPr marT="0" marB="0" anchor="ctr">
                     <a:lnL w="19050" cap="flat" cmpd="sng" algn="ctr">
                       <a:solidFill>
                         <a:srgbClr val="FFFFFF"/>
@@ -3018,7 +2934,7 @@
                     <a:bodyPr/>
                     <a:lstStyle/>
                     <a:p>
-                      <a:pPr indent="0" marL="0">
+                      <a:pPr marL="0" indent="0">
                         <a:buNone/>
                       </a:pPr>
                       <a:r>
@@ -3039,7 +2955,7 @@
                       </a:endParaRPr>
                     </a:p>
                   </a:txBody>
-                  <a:tcPr marL="91440" marR="91440" marT="0" marB="0" anchor="ctr">
+                  <a:tcPr marT="0" marB="0" anchor="ctr">
                     <a:lnL w="19050" cap="flat" cmpd="sng" algn="ctr">
                       <a:solidFill>
                         <a:srgbClr val="FFFFFF"/>
@@ -3081,6 +2997,11 @@
                     </a:solidFill>
                   </a:tcPr>
                 </a:tc>
+                <a:extLst>
+                  <a:ext uri="{0D108BD9-81ED-4DB2-BD59-A6C34878D82A}">
+                    <a16:rowId xmlns:a16="http://schemas.microsoft.com/office/drawing/2014/main" val="10004"/>
+                  </a:ext>
+                </a:extLst>
               </a:tr>
               <a:tr h="320040">
                 <a:tc>
@@ -3088,7 +3009,7 @@
                     <a:bodyPr/>
                     <a:lstStyle/>
                     <a:p>
-                      <a:pPr indent="0" marL="0">
+                      <a:pPr marL="0" indent="0">
                         <a:buNone/>
                       </a:pPr>
                       <a:r>
@@ -3109,7 +3030,7 @@
                       </a:endParaRPr>
                     </a:p>
                   </a:txBody>
-                  <a:tcPr marL="91440" marR="91440" marT="0" marB="0" anchor="ctr">
+                  <a:tcPr marT="0" marB="0" anchor="ctr">
                     <a:lnL w="19050" cap="flat" cmpd="sng" algn="ctr">
                       <a:solidFill>
                         <a:srgbClr val="FFFFFF"/>
@@ -3156,7 +3077,7 @@
                     <a:bodyPr/>
                     <a:lstStyle/>
                     <a:p>
-                      <a:pPr indent="0" marL="0">
+                      <a:pPr marL="0" indent="0">
                         <a:buNone/>
                       </a:pPr>
                       <a:r>
@@ -3177,7 +3098,7 @@
                       </a:endParaRPr>
                     </a:p>
                   </a:txBody>
-                  <a:tcPr marL="91440" marR="91440" marT="0" marB="0" anchor="ctr">
+                  <a:tcPr marT="0" marB="0" anchor="ctr">
                     <a:lnL w="19050" cap="flat" cmpd="sng" algn="ctr">
                       <a:solidFill>
                         <a:srgbClr val="FFFFFF"/>
@@ -3219,6 +3140,11 @@
                     </a:solidFill>
                   </a:tcPr>
                 </a:tc>
+                <a:extLst>
+                  <a:ext uri="{0D108BD9-81ED-4DB2-BD59-A6C34878D82A}">
+                    <a16:rowId xmlns:a16="http://schemas.microsoft.com/office/drawing/2014/main" val="10005"/>
+                  </a:ext>
+                </a:extLst>
               </a:tr>
               <a:tr h="320040">
                 <a:tc>
@@ -3226,7 +3152,7 @@
                     <a:bodyPr/>
                     <a:lstStyle/>
                     <a:p>
-                      <a:pPr indent="0" marL="0">
+                      <a:pPr marL="0" indent="0">
                         <a:buNone/>
                       </a:pPr>
                       <a:r>
@@ -3247,7 +3173,7 @@
                       </a:endParaRPr>
                     </a:p>
                   </a:txBody>
-                  <a:tcPr marL="91440" marR="91440" marT="0" marB="0" anchor="ctr">
+                  <a:tcPr marT="0" marB="0" anchor="ctr">
                     <a:lnL w="19050" cap="flat" cmpd="sng" algn="ctr">
                       <a:solidFill>
                         <a:srgbClr val="FFFFFF"/>
@@ -3294,7 +3220,7 @@
                     <a:bodyPr/>
                     <a:lstStyle/>
                     <a:p>
-                      <a:pPr indent="0" marL="0">
+                      <a:pPr marL="0" indent="0">
                         <a:buNone/>
                       </a:pPr>
                       <a:r>
@@ -3315,7 +3241,7 @@
                       </a:endParaRPr>
                     </a:p>
                   </a:txBody>
-                  <a:tcPr marL="91440" marR="91440" marT="0" marB="0" anchor="ctr">
+                  <a:tcPr marT="0" marB="0" anchor="ctr">
                     <a:lnL w="19050" cap="flat" cmpd="sng" algn="ctr">
                       <a:solidFill>
                         <a:srgbClr val="FFFFFF"/>
@@ -3357,6 +3283,11 @@
                     </a:solidFill>
                   </a:tcPr>
                 </a:tc>
+                <a:extLst>
+                  <a:ext uri="{0D108BD9-81ED-4DB2-BD59-A6C34878D82A}">
+                    <a16:rowId xmlns:a16="http://schemas.microsoft.com/office/drawing/2014/main" val="10006"/>
+                  </a:ext>
+                </a:extLst>
               </a:tr>
               <a:tr h="320040">
                 <a:tc>
@@ -3364,7 +3295,7 @@
                     <a:bodyPr/>
                     <a:lstStyle/>
                     <a:p>
-                      <a:pPr indent="0" marL="0">
+                      <a:pPr marL="0" indent="0">
                         <a:buNone/>
                       </a:pPr>
                       <a:r>
@@ -3385,7 +3316,7 @@
                       </a:endParaRPr>
                     </a:p>
                   </a:txBody>
-                  <a:tcPr marL="91440" marR="91440" marT="0" marB="0" anchor="ctr">
+                  <a:tcPr marT="0" marB="0" anchor="ctr">
                     <a:lnL w="19050" cap="flat" cmpd="sng" algn="ctr">
                       <a:solidFill>
                         <a:srgbClr val="FFFFFF"/>
@@ -3432,7 +3363,7 @@
                     <a:bodyPr/>
                     <a:lstStyle/>
                     <a:p>
-                      <a:pPr indent="0" marL="0">
+                      <a:pPr marL="0" indent="0">
                         <a:buNone/>
                       </a:pPr>
                       <a:r>
@@ -3453,7 +3384,7 @@
                       </a:endParaRPr>
                     </a:p>
                   </a:txBody>
-                  <a:tcPr marL="91440" marR="91440" marT="0" marB="0" anchor="ctr">
+                  <a:tcPr marT="0" marB="0" anchor="ctr">
                     <a:lnL w="19050" cap="flat" cmpd="sng" algn="ctr">
                       <a:solidFill>
                         <a:srgbClr val="FFFFFF"/>
@@ -3495,6 +3426,11 @@
                     </a:solidFill>
                   </a:tcPr>
                 </a:tc>
+                <a:extLst>
+                  <a:ext uri="{0D108BD9-81ED-4DB2-BD59-A6C34878D82A}">
+                    <a16:rowId xmlns:a16="http://schemas.microsoft.com/office/drawing/2014/main" val="10007"/>
+                  </a:ext>
+                </a:extLst>
               </a:tr>
               <a:tr h="320040">
                 <a:tc>
@@ -3502,7 +3438,7 @@
                     <a:bodyPr/>
                     <a:lstStyle/>
                     <a:p>
-                      <a:pPr indent="0" marL="0">
+                      <a:pPr marL="0" indent="0">
                         <a:buNone/>
                       </a:pPr>
                       <a:r>
@@ -3523,7 +3459,7 @@
                       </a:endParaRPr>
                     </a:p>
                   </a:txBody>
-                  <a:tcPr marL="91440" marR="91440" marT="0" marB="0" anchor="ctr">
+                  <a:tcPr marT="0" marB="0" anchor="ctr">
                     <a:lnL w="19050" cap="flat" cmpd="sng" algn="ctr">
                       <a:solidFill>
                         <a:srgbClr val="FFFFFF"/>
@@ -3570,7 +3506,7 @@
                     <a:bodyPr/>
                     <a:lstStyle/>
                     <a:p>
-                      <a:pPr indent="0" marL="0">
+                      <a:pPr marL="0" indent="0">
                         <a:buNone/>
                       </a:pPr>
                       <a:r>
@@ -3591,7 +3527,7 @@
                       </a:endParaRPr>
                     </a:p>
                   </a:txBody>
-                  <a:tcPr marL="91440" marR="91440" marT="0" marB="0" anchor="ctr">
+                  <a:tcPr marT="0" marB="0" anchor="ctr">
                     <a:lnL w="19050" cap="flat" cmpd="sng" algn="ctr">
                       <a:solidFill>
                         <a:srgbClr val="FFFFFF"/>
@@ -3633,6 +3569,11 @@
                     </a:solidFill>
                   </a:tcPr>
                 </a:tc>
+                <a:extLst>
+                  <a:ext uri="{0D108BD9-81ED-4DB2-BD59-A6C34878D82A}">
+                    <a16:rowId xmlns:a16="http://schemas.microsoft.com/office/drawing/2014/main" val="10008"/>
+                  </a:ext>
+                </a:extLst>
               </a:tr>
               <a:tr h="320040">
                 <a:tc>
@@ -3640,7 +3581,7 @@
                     <a:bodyPr/>
                     <a:lstStyle/>
                     <a:p>
-                      <a:pPr indent="0" marL="0">
+                      <a:pPr marL="0" indent="0">
                         <a:buNone/>
                       </a:pPr>
                       <a:r>
@@ -3661,7 +3602,7 @@
                       </a:endParaRPr>
                     </a:p>
                   </a:txBody>
-                  <a:tcPr marL="91440" marR="91440" marT="0" marB="0" anchor="ctr">
+                  <a:tcPr marT="0" marB="0" anchor="ctr">
                     <a:lnL w="19050" cap="flat" cmpd="sng" algn="ctr">
                       <a:solidFill>
                         <a:srgbClr val="FFFFFF"/>
@@ -3708,7 +3649,7 @@
                     <a:bodyPr/>
                     <a:lstStyle/>
                     <a:p>
-                      <a:pPr indent="0" marL="0">
+                      <a:pPr marL="0" indent="0">
                         <a:buNone/>
                       </a:pPr>
                       <a:r>
@@ -3729,7 +3670,7 @@
                       </a:endParaRPr>
                     </a:p>
                   </a:txBody>
-                  <a:tcPr marL="91440" marR="91440" marT="0" marB="0" anchor="ctr">
+                  <a:tcPr marT="0" marB="0" anchor="ctr">
                     <a:lnL w="19050" cap="flat" cmpd="sng" algn="ctr">
                       <a:solidFill>
                         <a:srgbClr val="FFFFFF"/>
@@ -3771,6 +3712,11 @@
                     </a:solidFill>
                   </a:tcPr>
                 </a:tc>
+                <a:extLst>
+                  <a:ext uri="{0D108BD9-81ED-4DB2-BD59-A6C34878D82A}">
+                    <a16:rowId xmlns:a16="http://schemas.microsoft.com/office/drawing/2014/main" val="10009"/>
+                  </a:ext>
+                </a:extLst>
               </a:tr>
               <a:tr h="320040">
                 <a:tc>
@@ -3778,7 +3724,7 @@
                     <a:bodyPr/>
                     <a:lstStyle/>
                     <a:p>
-                      <a:pPr indent="0" marL="0">
+                      <a:pPr marL="0" indent="0">
                         <a:buNone/>
                       </a:pPr>
                       <a:r>
@@ -3799,7 +3745,7 @@
                       </a:endParaRPr>
                     </a:p>
                   </a:txBody>
-                  <a:tcPr marL="91440" marR="91440" marT="0" marB="0" anchor="ctr">
+                  <a:tcPr marT="0" marB="0" anchor="ctr">
                     <a:lnL w="19050" cap="flat" cmpd="sng" algn="ctr">
                       <a:solidFill>
                         <a:srgbClr val="FFFFFF"/>
@@ -3846,7 +3792,7 @@
                     <a:bodyPr/>
                     <a:lstStyle/>
                     <a:p>
-                      <a:pPr indent="0" marL="0">
+                      <a:pPr marL="0" indent="0">
                         <a:buNone/>
                       </a:pPr>
                       <a:r>
@@ -3867,7 +3813,7 @@
                       </a:endParaRPr>
                     </a:p>
                   </a:txBody>
-                  <a:tcPr marL="91440" marR="91440" marT="0" marB="0" anchor="ctr">
+                  <a:tcPr marT="0" marB="0" anchor="ctr">
                     <a:lnL w="19050" cap="flat" cmpd="sng" algn="ctr">
                       <a:solidFill>
                         <a:srgbClr val="FFFFFF"/>
@@ -3909,6 +3855,11 @@
                     </a:solidFill>
                   </a:tcPr>
                 </a:tc>
+                <a:extLst>
+                  <a:ext uri="{0D108BD9-81ED-4DB2-BD59-A6C34878D82A}">
+                    <a16:rowId xmlns:a16="http://schemas.microsoft.com/office/drawing/2014/main" val="10010"/>
+                  </a:ext>
+                </a:extLst>
               </a:tr>
             </a:tbl>
           </a:graphicData>
@@ -3930,15 +3881,27 @@
         </p:nvGraphicFramePr>
         <p:xfrm>
           <a:off x="5669280" y="1188720"/>
-          <a:ext cx="3017520" cy="914400"/>
+          <a:ext cx="3017520" cy="1280160"/>
         </p:xfrm>
         <a:graphic>
           <a:graphicData uri="http://schemas.openxmlformats.org/drawingml/2006/table">
             <a:tbl>
               <a:tblPr/>
               <a:tblGrid>
-                <a:gridCol w="1965960"/>
-                <a:gridCol w="1051560"/>
+                <a:gridCol w="1965960">
+                  <a:extLst>
+                    <a:ext uri="{9D8B030D-6E8A-4147-A177-3AD203B41FA5}">
+                      <a16:colId xmlns:a16="http://schemas.microsoft.com/office/drawing/2014/main" val="20000"/>
+                    </a:ext>
+                  </a:extLst>
+                </a:gridCol>
+                <a:gridCol w="1051560">
+                  <a:extLst>
+                    <a:ext uri="{9D8B030D-6E8A-4147-A177-3AD203B41FA5}">
+                      <a16:colId xmlns:a16="http://schemas.microsoft.com/office/drawing/2014/main" val="20001"/>
+                    </a:ext>
+                  </a:extLst>
+                </a:gridCol>
               </a:tblGrid>
               <a:tr h="320040">
                 <a:tc>
@@ -3946,7 +3909,7 @@
                     <a:bodyPr/>
                     <a:lstStyle/>
                     <a:p>
-                      <a:pPr indent="0" marL="0">
+                      <a:pPr marL="0" indent="0">
                         <a:buNone/>
                       </a:pPr>
                       <a:r>
@@ -3967,7 +3930,7 @@
                       </a:endParaRPr>
                     </a:p>
                   </a:txBody>
-                  <a:tcPr marL="91440" marR="91440" marT="0" marB="0" anchor="ctr">
+                  <a:tcPr marT="0" marB="0" anchor="ctr">
                     <a:lnL w="19050" cap="flat" cmpd="sng" algn="ctr">
                       <a:solidFill>
                         <a:srgbClr val="FFFFFF"/>
@@ -4014,7 +3977,7 @@
                     <a:bodyPr/>
                     <a:lstStyle/>
                     <a:p>
-                      <a:pPr indent="0" marL="0">
+                      <a:pPr marL="0" indent="0">
                         <a:buNone/>
                       </a:pPr>
                       <a:r>
@@ -4035,7 +3998,7 @@
                       </a:endParaRPr>
                     </a:p>
                   </a:txBody>
-                  <a:tcPr marL="91440" marR="91440" marT="0" marB="0" anchor="ctr">
+                  <a:tcPr marT="0" marB="0" anchor="ctr">
                     <a:lnL w="19050" cap="flat" cmpd="sng" algn="ctr">
                       <a:solidFill>
                         <a:srgbClr val="FFFFFF"/>
@@ -4077,6 +4040,11 @@
                     </a:solidFill>
                   </a:tcPr>
                 </a:tc>
+                <a:extLst>
+                  <a:ext uri="{0D108BD9-81ED-4DB2-BD59-A6C34878D82A}">
+                    <a16:rowId xmlns:a16="http://schemas.microsoft.com/office/drawing/2014/main" val="10000"/>
+                  </a:ext>
+                </a:extLst>
               </a:tr>
               <a:tr h="320040">
                 <a:tc>
@@ -4084,7 +4052,7 @@
                     <a:bodyPr/>
                     <a:lstStyle/>
                     <a:p>
-                      <a:pPr indent="0" marL="0">
+                      <a:pPr marL="0" indent="0">
                         <a:buNone/>
                       </a:pPr>
                       <a:r>
@@ -4105,7 +4073,7 @@
                       </a:endParaRPr>
                     </a:p>
                   </a:txBody>
-                  <a:tcPr marL="91440" marR="91440" marT="0" marB="0" anchor="ctr">
+                  <a:tcPr marT="0" marB="0" anchor="ctr">
                     <a:lnL w="19050" cap="flat" cmpd="sng" algn="ctr">
                       <a:solidFill>
                         <a:srgbClr val="FFFFFF"/>
@@ -4152,7 +4120,7 @@
                     <a:bodyPr/>
                     <a:lstStyle/>
                     <a:p>
-                      <a:pPr indent="0" marL="0">
+                      <a:pPr marL="0" indent="0">
                         <a:buNone/>
                       </a:pPr>
                       <a:r>
@@ -4173,7 +4141,7 @@
                       </a:endParaRPr>
                     </a:p>
                   </a:txBody>
-                  <a:tcPr marL="91440" marR="91440" marT="0" marB="0" anchor="ctr">
+                  <a:tcPr marT="0" marB="0" anchor="ctr">
                     <a:lnL w="19050" cap="flat" cmpd="sng" algn="ctr">
                       <a:solidFill>
                         <a:srgbClr val="FFFFFF"/>
@@ -4215,6 +4183,11 @@
                     </a:solidFill>
                   </a:tcPr>
                 </a:tc>
+                <a:extLst>
+                  <a:ext uri="{0D108BD9-81ED-4DB2-BD59-A6C34878D82A}">
+                    <a16:rowId xmlns:a16="http://schemas.microsoft.com/office/drawing/2014/main" val="10001"/>
+                  </a:ext>
+                </a:extLst>
               </a:tr>
               <a:tr h="320040">
                 <a:tc>
@@ -4222,7 +4195,7 @@
                     <a:bodyPr/>
                     <a:lstStyle/>
                     <a:p>
-                      <a:pPr indent="0" marL="0">
+                      <a:pPr marL="0" indent="0">
                         <a:buNone/>
                       </a:pPr>
                       <a:r>
@@ -4243,7 +4216,7 @@
                       </a:endParaRPr>
                     </a:p>
                   </a:txBody>
-                  <a:tcPr marL="91440" marR="91440" marT="0" marB="0" anchor="ctr">
+                  <a:tcPr marT="0" marB="0" anchor="ctr">
                     <a:lnL w="19050" cap="flat" cmpd="sng" algn="ctr">
                       <a:solidFill>
                         <a:srgbClr val="FFFFFF"/>
@@ -4290,7 +4263,7 @@
                     <a:bodyPr/>
                     <a:lstStyle/>
                     <a:p>
-                      <a:pPr indent="0" marL="0">
+                      <a:pPr marL="0" indent="0">
                         <a:buNone/>
                       </a:pPr>
                       <a:r>
@@ -4311,7 +4284,7 @@
                       </a:endParaRPr>
                     </a:p>
                   </a:txBody>
-                  <a:tcPr marL="91440" marR="91440" marT="0" marB="0" anchor="ctr">
+                  <a:tcPr marT="0" marB="0" anchor="ctr">
                     <a:lnL w="19050" cap="flat" cmpd="sng" algn="ctr">
                       <a:solidFill>
                         <a:srgbClr val="FFFFFF"/>
@@ -4353,6 +4326,11 @@
                     </a:solidFill>
                   </a:tcPr>
                 </a:tc>
+                <a:extLst>
+                  <a:ext uri="{0D108BD9-81ED-4DB2-BD59-A6C34878D82A}">
+                    <a16:rowId xmlns:a16="http://schemas.microsoft.com/office/drawing/2014/main" val="10002"/>
+                  </a:ext>
+                </a:extLst>
               </a:tr>
               <a:tr h="320040">
                 <a:tc>
@@ -4360,7 +4338,7 @@
                     <a:bodyPr/>
                     <a:lstStyle/>
                     <a:p>
-                      <a:pPr indent="0" marL="0">
+                      <a:pPr marL="0" indent="0">
                         <a:buNone/>
                       </a:pPr>
                       <a:r>
@@ -4381,7 +4359,7 @@
                       </a:endParaRPr>
                     </a:p>
                   </a:txBody>
-                  <a:tcPr marL="91440" marR="91440" marT="0" marB="0" anchor="ctr">
+                  <a:tcPr marT="0" marB="0" anchor="ctr">
                     <a:lnL w="19050" cap="flat" cmpd="sng" algn="ctr">
                       <a:solidFill>
                         <a:srgbClr val="FFFFFF"/>
@@ -4428,7 +4406,7 @@
                     <a:bodyPr/>
                     <a:lstStyle/>
                     <a:p>
-                      <a:pPr indent="0" marL="0">
+                      <a:pPr marL="0" indent="0">
                         <a:buNone/>
                       </a:pPr>
                       <a:r>
@@ -4449,7 +4427,7 @@
                       </a:endParaRPr>
                     </a:p>
                   </a:txBody>
-                  <a:tcPr marL="91440" marR="91440" marT="0" marB="0" anchor="ctr">
+                  <a:tcPr marT="0" marB="0" anchor="ctr">
                     <a:lnL w="19050" cap="flat" cmpd="sng" algn="ctr">
                       <a:solidFill>
                         <a:srgbClr val="FFFFFF"/>
@@ -4491,6 +4469,11 @@
                     </a:solidFill>
                   </a:tcPr>
                 </a:tc>
+                <a:extLst>
+                  <a:ext uri="{0D108BD9-81ED-4DB2-BD59-A6C34878D82A}">
+                    <a16:rowId xmlns:a16="http://schemas.microsoft.com/office/drawing/2014/main" val="10003"/>
+                  </a:ext>
+                </a:extLst>
               </a:tr>
             </a:tbl>
           </a:graphicData>
@@ -4522,6 +4505,13 @@
             <a:prstDash val="solid"/>
           </a:ln>
         </p:spPr>
+        <p:txBody>
+          <a:bodyPr/>
+          <a:lstStyle/>
+          <a:p>
+            <a:endParaRPr lang="es-PE"/>
+          </a:p>
+        </p:txBody>
       </p:sp>
       <p:sp>
         <p:nvSpPr>
@@ -4547,17 +4537,24 @@
             <a:prstDash val="solid"/>
           </a:ln>
         </p:spPr>
+        <p:txBody>
+          <a:bodyPr/>
+          <a:lstStyle/>
+          <a:p>
+            <a:endParaRPr lang="es-PE"/>
+          </a:p>
+        </p:txBody>
       </p:sp>
       <p:pic>
         <p:nvPicPr>
-          <p:cNvPr id="7" name="Image 0" descr="preencoded.png">    </p:cNvPr>
+          <p:cNvPr id="7" name="Image 0" descr="preencoded.png"/>
           <p:cNvPicPr>
             <a:picLocks noChangeAspect="1"/>
           </p:cNvPicPr>
           <p:nvPr/>
         </p:nvPicPr>
         <p:blipFill>
-          <a:blip r:embed="rId1"/>
+          <a:blip r:embed="rId3"/>
           <a:stretch>
             <a:fillRect/>
           </a:stretch>
@@ -4593,7 +4590,7 @@
           <a:bodyPr wrap="square" lIns="0" tIns="0" rIns="0" bIns="0" rtlCol="0" anchor="ctr"/>
           <a:lstStyle/>
           <a:p>
-            <a:pPr indent="0" marL="0">
+            <a:pPr marL="0" indent="0">
               <a:buNone/>
             </a:pPr>
             <a:r>
@@ -4632,7 +4629,7 @@
           <a:bodyPr wrap="square" lIns="0" tIns="0" rIns="0" bIns="0" rtlCol="0" anchor="t"/>
           <a:lstStyle/>
           <a:p>
-            <a:pPr indent="0" marL="0">
+            <a:pPr marL="0" indent="0">
               <a:buNone/>
             </a:pPr>
             <a:r>
@@ -4666,6 +4663,7 @@
         <a:solidFill>
           <a:srgbClr val="FFFFFF"/>
         </a:solidFill>
+        <a:effectLst/>
       </p:bgPr>
     </p:bg>
     <p:spTree>
@@ -4703,7 +4701,7 @@
           <a:bodyPr wrap="square" lIns="0" tIns="0" rIns="0" bIns="0" rtlCol="0" anchor="ctr"/>
           <a:lstStyle/>
           <a:p>
-            <a:pPr indent="0" marL="0">
+            <a:pPr marL="0" indent="0">
               <a:buNone/>
             </a:pPr>
             <a:r>
@@ -4747,6 +4745,13 @@
             <a:prstDash val="solid"/>
           </a:ln>
         </p:spPr>
+        <p:txBody>
+          <a:bodyPr/>
+          <a:lstStyle/>
+          <a:p>
+            <a:endParaRPr lang="es-PE"/>
+          </a:p>
+        </p:txBody>
       </p:sp>
       <p:sp>
         <p:nvSpPr>
@@ -4772,17 +4777,24 @@
             <a:prstDash val="solid"/>
           </a:ln>
         </p:spPr>
+        <p:txBody>
+          <a:bodyPr/>
+          <a:lstStyle/>
+          <a:p>
+            <a:endParaRPr lang="es-PE"/>
+          </a:p>
+        </p:txBody>
       </p:sp>
       <p:pic>
         <p:nvPicPr>
-          <p:cNvPr id="5" name="Image 0" descr="preencoded.png">    </p:cNvPr>
+          <p:cNvPr id="5" name="Image 0" descr="preencoded.png"/>
           <p:cNvPicPr>
             <a:picLocks noChangeAspect="1"/>
           </p:cNvPicPr>
           <p:nvPr/>
         </p:nvPicPr>
         <p:blipFill>
-          <a:blip r:embed="rId1"/>
+          <a:blip r:embed="rId3"/>
           <a:stretch>
             <a:fillRect/>
           </a:stretch>
@@ -4818,7 +4830,7 @@
           <a:bodyPr wrap="square" lIns="0" tIns="0" rIns="0" bIns="0" rtlCol="0" anchor="t"/>
           <a:lstStyle/>
           <a:p>
-            <a:pPr indent="0" marL="0">
+            <a:pPr marL="0" indent="0">
               <a:buNone/>
             </a:pPr>
             <a:r>
@@ -4857,7 +4869,7 @@
           <a:bodyPr wrap="square" lIns="0" tIns="0" rIns="0" bIns="0" rtlCol="0" anchor="t"/>
           <a:lstStyle/>
           <a:p>
-            <a:pPr indent="0" marL="0">
+            <a:pPr marL="0" indent="0">
               <a:buNone/>
             </a:pPr>
             <a:r>
@@ -4896,7 +4908,7 @@
           <a:bodyPr wrap="square" lIns="0" tIns="0" rIns="0" bIns="0" rtlCol="0" anchor="t"/>
           <a:lstStyle/>
           <a:p>
-            <a:pPr indent="0" marL="0">
+            <a:pPr marL="0" indent="0">
               <a:buNone/>
             </a:pPr>
             <a:r>
@@ -4937,6 +4949,13 @@
             <a:tailEnd type="triangle"/>
           </a:ln>
         </p:spPr>
+        <p:txBody>
+          <a:bodyPr/>
+          <a:lstStyle/>
+          <a:p>
+            <a:endParaRPr lang="es-PE"/>
+          </a:p>
+        </p:txBody>
       </p:sp>
       <p:sp>
         <p:nvSpPr>
@@ -4964,6 +4983,13 @@
             <a:prstDash val="solid"/>
           </a:ln>
         </p:spPr>
+        <p:txBody>
+          <a:bodyPr/>
+          <a:lstStyle/>
+          <a:p>
+            <a:endParaRPr lang="es-PE"/>
+          </a:p>
+        </p:txBody>
       </p:sp>
       <p:sp>
         <p:nvSpPr>
@@ -4989,17 +5015,24 @@
             <a:prstDash val="solid"/>
           </a:ln>
         </p:spPr>
+        <p:txBody>
+          <a:bodyPr/>
+          <a:lstStyle/>
+          <a:p>
+            <a:endParaRPr lang="es-PE"/>
+          </a:p>
+        </p:txBody>
       </p:sp>
       <p:pic>
         <p:nvPicPr>
-          <p:cNvPr id="12" name="Image 1" descr="preencoded.png">    </p:cNvPr>
+          <p:cNvPr id="12" name="Image 1" descr="preencoded.png"/>
           <p:cNvPicPr>
             <a:picLocks noChangeAspect="1"/>
           </p:cNvPicPr>
           <p:nvPr/>
         </p:nvPicPr>
         <p:blipFill>
-          <a:blip r:embed="rId2"/>
+          <a:blip r:embed="rId4"/>
           <a:stretch>
             <a:fillRect/>
           </a:stretch>
@@ -5035,7 +5068,7 @@
           <a:bodyPr wrap="square" lIns="0" tIns="0" rIns="0" bIns="0" rtlCol="0" anchor="t"/>
           <a:lstStyle/>
           <a:p>
-            <a:pPr indent="0" marL="0">
+            <a:pPr marL="0" indent="0">
               <a:buNone/>
             </a:pPr>
             <a:r>
@@ -5074,7 +5107,7 @@
           <a:bodyPr wrap="square" lIns="0" tIns="0" rIns="0" bIns="0" rtlCol="0" anchor="t"/>
           <a:lstStyle/>
           <a:p>
-            <a:pPr indent="0" marL="0">
+            <a:pPr marL="0" indent="0">
               <a:buNone/>
             </a:pPr>
             <a:r>
@@ -5113,7 +5146,7 @@
           <a:bodyPr wrap="square" lIns="0" tIns="0" rIns="0" bIns="0" rtlCol="0" anchor="t"/>
           <a:lstStyle/>
           <a:p>
-            <a:pPr indent="0" marL="0">
+            <a:pPr marL="0" indent="0">
               <a:buNone/>
             </a:pPr>
             <a:r>
@@ -5154,6 +5187,13 @@
             <a:tailEnd type="triangle"/>
           </a:ln>
         </p:spPr>
+        <p:txBody>
+          <a:bodyPr/>
+          <a:lstStyle/>
+          <a:p>
+            <a:endParaRPr lang="es-PE"/>
+          </a:p>
+        </p:txBody>
       </p:sp>
       <p:sp>
         <p:nvSpPr>
@@ -5181,6 +5221,13 @@
             <a:prstDash val="solid"/>
           </a:ln>
         </p:spPr>
+        <p:txBody>
+          <a:bodyPr/>
+          <a:lstStyle/>
+          <a:p>
+            <a:endParaRPr lang="es-PE"/>
+          </a:p>
+        </p:txBody>
       </p:sp>
       <p:sp>
         <p:nvSpPr>
@@ -5206,17 +5253,24 @@
             <a:prstDash val="solid"/>
           </a:ln>
         </p:spPr>
+        <p:txBody>
+          <a:bodyPr/>
+          <a:lstStyle/>
+          <a:p>
+            <a:endParaRPr lang="es-PE"/>
+          </a:p>
+        </p:txBody>
       </p:sp>
       <p:pic>
         <p:nvPicPr>
-          <p:cNvPr id="19" name="Image 2" descr="preencoded.png">    </p:cNvPr>
+          <p:cNvPr id="19" name="Image 2" descr="preencoded.png"/>
           <p:cNvPicPr>
             <a:picLocks noChangeAspect="1"/>
           </p:cNvPicPr>
           <p:nvPr/>
         </p:nvPicPr>
         <p:blipFill>
-          <a:blip r:embed="rId3"/>
+          <a:blip r:embed="rId5"/>
           <a:stretch>
             <a:fillRect/>
           </a:stretch>
@@ -5252,7 +5306,7 @@
           <a:bodyPr wrap="square" lIns="0" tIns="0" rIns="0" bIns="0" rtlCol="0" anchor="t"/>
           <a:lstStyle/>
           <a:p>
-            <a:pPr indent="0" marL="0">
+            <a:pPr marL="0" indent="0">
               <a:buNone/>
             </a:pPr>
             <a:r>
@@ -5291,7 +5345,7 @@
           <a:bodyPr wrap="square" lIns="0" tIns="0" rIns="0" bIns="0" rtlCol="0" anchor="t"/>
           <a:lstStyle/>
           <a:p>
-            <a:pPr indent="0" marL="0">
+            <a:pPr marL="0" indent="0">
               <a:buNone/>
             </a:pPr>
             <a:r>
@@ -5330,7 +5384,7 @@
           <a:bodyPr wrap="square" lIns="0" tIns="0" rIns="0" bIns="0" rtlCol="0" anchor="t"/>
           <a:lstStyle/>
           <a:p>
-            <a:pPr indent="0" marL="0">
+            <a:pPr marL="0" indent="0">
               <a:buNone/>
             </a:pPr>
             <a:r>
@@ -5374,6 +5428,13 @@
             <a:prstDash val="solid"/>
           </a:ln>
         </p:spPr>
+        <p:txBody>
+          <a:bodyPr/>
+          <a:lstStyle/>
+          <a:p>
+            <a:endParaRPr lang="es-PE"/>
+          </a:p>
+        </p:txBody>
       </p:sp>
       <p:sp>
         <p:nvSpPr>
@@ -5396,7 +5457,7 @@
           <a:bodyPr wrap="square" lIns="0" tIns="0" rIns="0" bIns="0" rtlCol="0" anchor="t"/>
           <a:lstStyle/>
           <a:p>
-            <a:pPr indent="0" marL="0">
+            <a:pPr marL="0" indent="0">
               <a:buNone/>
             </a:pPr>
             <a:r>
@@ -5435,7 +5496,7 @@
           <a:bodyPr wrap="square" lIns="0" tIns="0" rIns="0" bIns="0" rtlCol="0" anchor="ctr"/>
           <a:lstStyle/>
           <a:p>
-            <a:pPr indent="0" marL="0">
+            <a:pPr marL="0" indent="0">
               <a:buNone/>
             </a:pPr>
             <a:r>
@@ -5474,7 +5535,7 @@
           <a:bodyPr wrap="square" lIns="0" tIns="0" rIns="0" bIns="0" rtlCol="0" anchor="t"/>
           <a:lstStyle/>
           <a:p>
-            <a:pPr indent="0" marL="0">
+            <a:pPr marL="0" indent="0">
               <a:buNone/>
             </a:pPr>
             <a:r>
@@ -5518,6 +5579,13 @@
             <a:prstDash val="solid"/>
           </a:ln>
         </p:spPr>
+        <p:txBody>
+          <a:bodyPr/>
+          <a:lstStyle/>
+          <a:p>
+            <a:endParaRPr lang="es-PE"/>
+          </a:p>
+        </p:txBody>
       </p:sp>
       <p:sp>
         <p:nvSpPr>
@@ -5540,7 +5608,7 @@
           <a:bodyPr wrap="square" lIns="0" tIns="0" rIns="0" bIns="0" rtlCol="0" anchor="t"/>
           <a:lstStyle/>
           <a:p>
-            <a:pPr indent="0" marL="0">
+            <a:pPr marL="0" indent="0">
               <a:buNone/>
             </a:pPr>
             <a:r>
@@ -5579,7 +5647,7 @@
           <a:bodyPr wrap="square" lIns="0" tIns="0" rIns="0" bIns="0" rtlCol="0" anchor="t"/>
           <a:lstStyle/>
           <a:p>
-            <a:pPr indent="0" marL="0">
+            <a:pPr marL="0" indent="0">
               <a:buNone/>
             </a:pPr>
             <a:r>
@@ -5613,6 +5681,7 @@
         <a:solidFill>
           <a:srgbClr val="FFFFFF"/>
         </a:solidFill>
+        <a:effectLst/>
       </p:bgPr>
     </p:bg>
     <p:spTree>
@@ -5650,7 +5719,7 @@
           <a:bodyPr wrap="square" lIns="0" tIns="0" rIns="0" bIns="0" rtlCol="0" anchor="ctr"/>
           <a:lstStyle/>
           <a:p>
-            <a:pPr indent="0" marL="0">
+            <a:pPr marL="0" indent="0">
               <a:buNone/>
             </a:pPr>
             <a:r>
@@ -5694,6 +5763,13 @@
             <a:prstDash val="dash"/>
           </a:ln>
         </p:spPr>
+        <p:txBody>
+          <a:bodyPr/>
+          <a:lstStyle/>
+          <a:p>
+            <a:endParaRPr lang="es-PE"/>
+          </a:p>
+        </p:txBody>
       </p:sp>
       <p:sp>
         <p:nvSpPr>
@@ -5716,7 +5792,7 @@
           <a:bodyPr wrap="square" lIns="0" tIns="0" rIns="0" bIns="0" rtlCol="0" anchor="t"/>
           <a:lstStyle/>
           <a:p>
-            <a:pPr indent="0" marL="0">
+            <a:pPr marL="0" indent="0">
               <a:buNone/>
             </a:pPr>
             <a:r>
@@ -5758,6 +5834,13 @@
             <a:prstDash val="solid"/>
           </a:ln>
         </p:spPr>
+        <p:txBody>
+          <a:bodyPr/>
+          <a:lstStyle/>
+          <a:p>
+            <a:endParaRPr lang="es-PE"/>
+          </a:p>
+        </p:txBody>
       </p:sp>
       <p:sp>
         <p:nvSpPr>
@@ -5780,7 +5863,7 @@
           <a:bodyPr wrap="square" lIns="0" tIns="0" rIns="0" bIns="0" rtlCol="0" anchor="ctr"/>
           <a:lstStyle/>
           <a:p>
-            <a:pPr algn="ctr" indent="0" marL="0">
+            <a:pPr marL="0" indent="0" algn="ctr">
               <a:buNone/>
             </a:pPr>
             <a:r>
@@ -5822,6 +5905,13 @@
             <a:prstDash val="solid"/>
           </a:ln>
         </p:spPr>
+        <p:txBody>
+          <a:bodyPr/>
+          <a:lstStyle/>
+          <a:p>
+            <a:endParaRPr lang="es-PE"/>
+          </a:p>
+        </p:txBody>
       </p:sp>
       <p:sp>
         <p:nvSpPr>
@@ -5844,7 +5934,7 @@
           <a:bodyPr wrap="square" lIns="0" tIns="0" rIns="0" bIns="0" rtlCol="0" anchor="ctr"/>
           <a:lstStyle/>
           <a:p>
-            <a:pPr algn="ctr" indent="0" marL="0">
+            <a:pPr marL="0" indent="0" algn="ctr">
               <a:buNone/>
             </a:pPr>
             <a:r>
@@ -5886,6 +5976,13 @@
             <a:prstDash val="solid"/>
           </a:ln>
         </p:spPr>
+        <p:txBody>
+          <a:bodyPr/>
+          <a:lstStyle/>
+          <a:p>
+            <a:endParaRPr lang="es-PE"/>
+          </a:p>
+        </p:txBody>
       </p:sp>
       <p:sp>
         <p:nvSpPr>
@@ -5908,7 +6005,7 @@
           <a:bodyPr wrap="square" lIns="0" tIns="0" rIns="0" bIns="0" rtlCol="0" anchor="ctr"/>
           <a:lstStyle/>
           <a:p>
-            <a:pPr algn="ctr" indent="0" marL="0">
+            <a:pPr marL="0" indent="0" algn="ctr">
               <a:buNone/>
             </a:pPr>
             <a:r>
@@ -5952,6 +6049,13 @@
             <a:prstDash val="solid"/>
           </a:ln>
         </p:spPr>
+        <p:txBody>
+          <a:bodyPr/>
+          <a:lstStyle/>
+          <a:p>
+            <a:endParaRPr lang="es-PE"/>
+          </a:p>
+        </p:txBody>
       </p:sp>
       <p:sp>
         <p:nvSpPr>
@@ -5974,7 +6078,7 @@
           <a:bodyPr wrap="square" lIns="0" tIns="0" rIns="0" bIns="0" rtlCol="0" anchor="ctr"/>
           <a:lstStyle/>
           <a:p>
-            <a:pPr algn="ctr" indent="0" marL="0">
+            <a:pPr marL="0" indent="0" algn="ctr">
               <a:buNone/>
             </a:pPr>
             <a:r>
@@ -6018,6 +6122,13 @@
             <a:prstDash val="solid"/>
           </a:ln>
         </p:spPr>
+        <p:txBody>
+          <a:bodyPr/>
+          <a:lstStyle/>
+          <a:p>
+            <a:endParaRPr lang="es-PE"/>
+          </a:p>
+        </p:txBody>
       </p:sp>
       <p:sp>
         <p:nvSpPr>
@@ -6040,7 +6151,7 @@
           <a:bodyPr wrap="square" lIns="0" tIns="0" rIns="0" bIns="0" rtlCol="0" anchor="ctr"/>
           <a:lstStyle/>
           <a:p>
-            <a:pPr algn="ctr" indent="0" marL="0">
+            <a:pPr marL="0" indent="0" algn="ctr">
               <a:buNone/>
             </a:pPr>
             <a:r>
@@ -6084,6 +6195,13 @@
             <a:prstDash val="solid"/>
           </a:ln>
         </p:spPr>
+        <p:txBody>
+          <a:bodyPr/>
+          <a:lstStyle/>
+          <a:p>
+            <a:endParaRPr lang="es-PE"/>
+          </a:p>
+        </p:txBody>
       </p:sp>
       <p:sp>
         <p:nvSpPr>
@@ -6106,7 +6224,7 @@
           <a:bodyPr wrap="square" lIns="0" tIns="0" rIns="0" bIns="0" rtlCol="0" anchor="ctr"/>
           <a:lstStyle/>
           <a:p>
-            <a:pPr algn="ctr" indent="0" marL="0">
+            <a:pPr marL="0" indent="0" algn="ctr">
               <a:buNone/>
             </a:pPr>
             <a:r>
@@ -6148,6 +6266,13 @@
             <a:prstDash val="solid"/>
           </a:ln>
         </p:spPr>
+        <p:txBody>
+          <a:bodyPr/>
+          <a:lstStyle/>
+          <a:p>
+            <a:endParaRPr lang="es-PE"/>
+          </a:p>
+        </p:txBody>
       </p:sp>
       <p:sp>
         <p:nvSpPr>
@@ -6170,7 +6295,7 @@
           <a:bodyPr wrap="square" lIns="0" tIns="0" rIns="0" bIns="0" rtlCol="0" anchor="ctr"/>
           <a:lstStyle/>
           <a:p>
-            <a:pPr indent="0" marL="0">
+            <a:pPr marL="0" indent="0">
               <a:buNone/>
             </a:pPr>
             <a:r>
@@ -6212,17 +6337,24 @@
             <a:prstDash val="solid"/>
           </a:ln>
         </p:spPr>
+        <p:txBody>
+          <a:bodyPr/>
+          <a:lstStyle/>
+          <a:p>
+            <a:endParaRPr lang="es-PE"/>
+          </a:p>
+        </p:txBody>
       </p:sp>
       <p:pic>
         <p:nvPicPr>
-          <p:cNvPr id="20" name="Image 0" descr="preencoded.png">    </p:cNvPr>
+          <p:cNvPr id="20" name="Image 0" descr="preencoded.png"/>
           <p:cNvPicPr>
             <a:picLocks noChangeAspect="1"/>
           </p:cNvPicPr>
           <p:nvPr/>
         </p:nvPicPr>
         <p:blipFill>
-          <a:blip r:embed="rId1"/>
+          <a:blip r:embed="rId3"/>
           <a:stretch>
             <a:fillRect/>
           </a:stretch>
@@ -6258,7 +6390,7 @@
           <a:bodyPr wrap="square" lIns="0" tIns="0" rIns="0" bIns="0" rtlCol="0" anchor="t"/>
           <a:lstStyle/>
           <a:p>
-            <a:pPr indent="0" marL="0">
+            <a:pPr marL="0" indent="0">
               <a:buNone/>
             </a:pPr>
             <a:r>
@@ -6297,7 +6429,7 @@
           <a:bodyPr wrap="square" lIns="0" tIns="0" rIns="0" bIns="0" rtlCol="0" anchor="t"/>
           <a:lstStyle/>
           <a:p>
-            <a:pPr indent="0" marL="0">
+            <a:pPr marL="0" indent="0">
               <a:buNone/>
             </a:pPr>
             <a:r>
@@ -6339,17 +6471,24 @@
             <a:prstDash val="solid"/>
           </a:ln>
         </p:spPr>
+        <p:txBody>
+          <a:bodyPr/>
+          <a:lstStyle/>
+          <a:p>
+            <a:endParaRPr lang="es-PE"/>
+          </a:p>
+        </p:txBody>
       </p:sp>
       <p:pic>
         <p:nvPicPr>
-          <p:cNvPr id="24" name="Image 1" descr="preencoded.png">    </p:cNvPr>
+          <p:cNvPr id="24" name="Image 1" descr="preencoded.png"/>
           <p:cNvPicPr>
             <a:picLocks noChangeAspect="1"/>
           </p:cNvPicPr>
           <p:nvPr/>
         </p:nvPicPr>
         <p:blipFill>
-          <a:blip r:embed="rId2"/>
+          <a:blip r:embed="rId3"/>
           <a:stretch>
             <a:fillRect/>
           </a:stretch>
@@ -6385,7 +6524,7 @@
           <a:bodyPr wrap="square" lIns="0" tIns="0" rIns="0" bIns="0" rtlCol="0" anchor="t"/>
           <a:lstStyle/>
           <a:p>
-            <a:pPr indent="0" marL="0">
+            <a:pPr marL="0" indent="0">
               <a:buNone/>
             </a:pPr>
             <a:r>
@@ -6424,7 +6563,7 @@
           <a:bodyPr wrap="square" lIns="0" tIns="0" rIns="0" bIns="0" rtlCol="0" anchor="t"/>
           <a:lstStyle/>
           <a:p>
-            <a:pPr indent="0" marL="0">
+            <a:pPr marL="0" indent="0">
               <a:buNone/>
             </a:pPr>
             <a:r>
@@ -6466,10 +6605,17 @@
             <a:prstDash val="solid"/>
           </a:ln>
         </p:spPr>
+        <p:txBody>
+          <a:bodyPr/>
+          <a:lstStyle/>
+          <a:p>
+            <a:endParaRPr lang="es-PE"/>
+          </a:p>
+        </p:txBody>
       </p:sp>
       <p:pic>
         <p:nvPicPr>
-          <p:cNvPr id="28" name="Image 2" descr="preencoded.png">    </p:cNvPr>
+          <p:cNvPr id="28" name="Image 2" descr="preencoded.png"/>
           <p:cNvPicPr>
             <a:picLocks noChangeAspect="1"/>
           </p:cNvPicPr>
@@ -6512,7 +6658,7 @@
           <a:bodyPr wrap="square" lIns="0" tIns="0" rIns="0" bIns="0" rtlCol="0" anchor="t"/>
           <a:lstStyle/>
           <a:p>
-            <a:pPr indent="0" marL="0">
+            <a:pPr marL="0" indent="0">
               <a:buNone/>
             </a:pPr>
             <a:r>
@@ -6551,7 +6697,7 @@
           <a:bodyPr wrap="square" lIns="0" tIns="0" rIns="0" bIns="0" rtlCol="0" anchor="t"/>
           <a:lstStyle/>
           <a:p>
-            <a:pPr indent="0" marL="0">
+            <a:pPr marL="0" indent="0">
               <a:buNone/>
             </a:pPr>
             <a:r>
@@ -6593,17 +6739,24 @@
             <a:prstDash val="solid"/>
           </a:ln>
         </p:spPr>
+        <p:txBody>
+          <a:bodyPr/>
+          <a:lstStyle/>
+          <a:p>
+            <a:endParaRPr lang="es-PE"/>
+          </a:p>
+        </p:txBody>
       </p:sp>
       <p:pic>
         <p:nvPicPr>
-          <p:cNvPr id="32" name="Image 3" descr="preencoded.png">    </p:cNvPr>
+          <p:cNvPr id="32" name="Image 3" descr="preencoded.png"/>
           <p:cNvPicPr>
             <a:picLocks noChangeAspect="1"/>
           </p:cNvPicPr>
           <p:nvPr/>
         </p:nvPicPr>
         <p:blipFill>
-          <a:blip r:embed="rId4"/>
+          <a:blip r:embed="rId3"/>
           <a:stretch>
             <a:fillRect/>
           </a:stretch>
@@ -6639,7 +6792,7 @@
           <a:bodyPr wrap="square" lIns="0" tIns="0" rIns="0" bIns="0" rtlCol="0" anchor="t"/>
           <a:lstStyle/>
           <a:p>
-            <a:pPr indent="0" marL="0">
+            <a:pPr marL="0" indent="0">
               <a:buNone/>
             </a:pPr>
             <a:r>
@@ -6678,7 +6831,7 @@
           <a:bodyPr wrap="square" lIns="0" tIns="0" rIns="0" bIns="0" rtlCol="0" anchor="t"/>
           <a:lstStyle/>
           <a:p>
-            <a:pPr indent="0" marL="0">
+            <a:pPr marL="0" indent="0">
               <a:buNone/>
             </a:pPr>
             <a:r>
@@ -6717,7 +6870,7 @@
           <a:bodyPr wrap="square" lIns="0" tIns="0" rIns="0" bIns="0" rtlCol="0" anchor="t"/>
           <a:lstStyle/>
           <a:p>
-            <a:pPr indent="0" marL="0">
+            <a:pPr marL="0" indent="0">
               <a:buNone/>
             </a:pPr>
             <a:r>
@@ -6751,6 +6904,7 @@
         <a:solidFill>
           <a:srgbClr val="082F67"/>
         </a:solidFill>
+        <a:effectLst/>
       </p:bgPr>
     </p:bg>
     <p:spTree>
@@ -6788,7 +6942,7 @@
           <a:bodyPr wrap="square" lIns="0" tIns="0" rIns="0" bIns="0" rtlCol="0" anchor="t"/>
           <a:lstStyle/>
           <a:p>
-            <a:pPr indent="0" marL="0">
+            <a:pPr marL="0" indent="0">
               <a:buNone/>
             </a:pPr>
             <a:r>
@@ -6832,6 +6986,13 @@
             <a:prstDash val="solid"/>
           </a:ln>
         </p:spPr>
+        <p:txBody>
+          <a:bodyPr/>
+          <a:lstStyle/>
+          <a:p>
+            <a:endParaRPr lang="es-PE"/>
+          </a:p>
+        </p:txBody>
       </p:sp>
       <p:sp>
         <p:nvSpPr>
@@ -6857,17 +7018,24 @@
             <a:prstDash val="solid"/>
           </a:ln>
         </p:spPr>
+        <p:txBody>
+          <a:bodyPr/>
+          <a:lstStyle/>
+          <a:p>
+            <a:endParaRPr lang="es-PE"/>
+          </a:p>
+        </p:txBody>
       </p:sp>
       <p:pic>
         <p:nvPicPr>
-          <p:cNvPr id="5" name="Image 0" descr="preencoded.png">    </p:cNvPr>
+          <p:cNvPr id="5" name="Image 0" descr="preencoded.png"/>
           <p:cNvPicPr>
             <a:picLocks noChangeAspect="1"/>
           </p:cNvPicPr>
           <p:nvPr/>
         </p:nvPicPr>
         <p:blipFill>
-          <a:blip r:embed="rId1"/>
+          <a:blip r:embed="rId3"/>
           <a:stretch>
             <a:fillRect/>
           </a:stretch>
@@ -6903,7 +7071,7 @@
           <a:bodyPr wrap="square" lIns="0" tIns="0" rIns="0" bIns="0" rtlCol="0" anchor="t"/>
           <a:lstStyle/>
           <a:p>
-            <a:pPr indent="0" marL="0">
+            <a:pPr marL="0" indent="0">
               <a:buNone/>
             </a:pPr>
             <a:r>
@@ -6942,7 +7110,7 @@
           <a:bodyPr wrap="square" lIns="0" tIns="0" rIns="0" bIns="0" rtlCol="0" anchor="t"/>
           <a:lstStyle/>
           <a:p>
-            <a:pPr indent="0" marL="0">
+            <a:pPr marL="0" indent="0">
               <a:buNone/>
             </a:pPr>
             <a:r>
@@ -6986,6 +7154,13 @@
             <a:prstDash val="solid"/>
           </a:ln>
         </p:spPr>
+        <p:txBody>
+          <a:bodyPr/>
+          <a:lstStyle/>
+          <a:p>
+            <a:endParaRPr lang="es-PE"/>
+          </a:p>
+        </p:txBody>
       </p:sp>
       <p:sp>
         <p:nvSpPr>
@@ -7011,17 +7186,24 @@
             <a:prstDash val="solid"/>
           </a:ln>
         </p:spPr>
+        <p:txBody>
+          <a:bodyPr/>
+          <a:lstStyle/>
+          <a:p>
+            <a:endParaRPr lang="es-PE"/>
+          </a:p>
+        </p:txBody>
       </p:sp>
       <p:pic>
         <p:nvPicPr>
-          <p:cNvPr id="10" name="Image 1" descr="preencoded.png">    </p:cNvPr>
+          <p:cNvPr id="10" name="Image 1" descr="preencoded.png"/>
           <p:cNvPicPr>
             <a:picLocks noChangeAspect="1"/>
           </p:cNvPicPr>
           <p:nvPr/>
         </p:nvPicPr>
         <p:blipFill>
-          <a:blip r:embed="rId2"/>
+          <a:blip r:embed="rId4"/>
           <a:stretch>
             <a:fillRect/>
           </a:stretch>
@@ -7057,7 +7239,7 @@
           <a:bodyPr wrap="square" lIns="0" tIns="0" rIns="0" bIns="0" rtlCol="0" anchor="t"/>
           <a:lstStyle/>
           <a:p>
-            <a:pPr indent="0" marL="0">
+            <a:pPr marL="0" indent="0">
               <a:buNone/>
             </a:pPr>
             <a:r>
@@ -7096,7 +7278,7 @@
           <a:bodyPr wrap="square" lIns="0" tIns="0" rIns="0" bIns="0" rtlCol="0" anchor="t"/>
           <a:lstStyle/>
           <a:p>
-            <a:pPr indent="0" marL="0">
+            <a:pPr marL="0" indent="0">
               <a:buNone/>
             </a:pPr>
             <a:r>
@@ -7140,6 +7322,13 @@
             <a:prstDash val="solid"/>
           </a:ln>
         </p:spPr>
+        <p:txBody>
+          <a:bodyPr/>
+          <a:lstStyle/>
+          <a:p>
+            <a:endParaRPr lang="es-PE"/>
+          </a:p>
+        </p:txBody>
       </p:sp>
       <p:sp>
         <p:nvSpPr>
@@ -7165,17 +7354,24 @@
             <a:prstDash val="solid"/>
           </a:ln>
         </p:spPr>
+        <p:txBody>
+          <a:bodyPr/>
+          <a:lstStyle/>
+          <a:p>
+            <a:endParaRPr lang="es-PE"/>
+          </a:p>
+        </p:txBody>
       </p:sp>
       <p:pic>
         <p:nvPicPr>
-          <p:cNvPr id="15" name="Image 2" descr="preencoded.png">    </p:cNvPr>
+          <p:cNvPr id="15" name="Image 2" descr="preencoded.png"/>
           <p:cNvPicPr>
             <a:picLocks noChangeAspect="1"/>
           </p:cNvPicPr>
           <p:nvPr/>
         </p:nvPicPr>
         <p:blipFill>
-          <a:blip r:embed="rId3"/>
+          <a:blip r:embed="rId5"/>
           <a:stretch>
             <a:fillRect/>
           </a:stretch>
@@ -7211,7 +7407,7 @@
           <a:bodyPr wrap="square" lIns="0" tIns="0" rIns="0" bIns="0" rtlCol="0" anchor="t"/>
           <a:lstStyle/>
           <a:p>
-            <a:pPr indent="0" marL="0">
+            <a:pPr marL="0" indent="0">
               <a:buNone/>
             </a:pPr>
             <a:r>
@@ -7250,7 +7446,7 @@
           <a:bodyPr wrap="square" lIns="0" tIns="0" rIns="0" bIns="0" rtlCol="0" anchor="t"/>
           <a:lstStyle/>
           <a:p>
-            <a:pPr indent="0" marL="0">
+            <a:pPr marL="0" indent="0">
               <a:buNone/>
             </a:pPr>
             <a:r>
@@ -7294,6 +7490,13 @@
             <a:prstDash val="solid"/>
           </a:ln>
         </p:spPr>
+        <p:txBody>
+          <a:bodyPr/>
+          <a:lstStyle/>
+          <a:p>
+            <a:endParaRPr lang="es-PE"/>
+          </a:p>
+        </p:txBody>
       </p:sp>
       <p:sp>
         <p:nvSpPr>
@@ -7319,17 +7522,24 @@
             <a:prstDash val="solid"/>
           </a:ln>
         </p:spPr>
+        <p:txBody>
+          <a:bodyPr/>
+          <a:lstStyle/>
+          <a:p>
+            <a:endParaRPr lang="es-PE"/>
+          </a:p>
+        </p:txBody>
       </p:sp>
       <p:pic>
         <p:nvPicPr>
-          <p:cNvPr id="20" name="Image 3" descr="preencoded.png">    </p:cNvPr>
+          <p:cNvPr id="20" name="Image 3" descr="preencoded.png"/>
           <p:cNvPicPr>
             <a:picLocks noChangeAspect="1"/>
           </p:cNvPicPr>
           <p:nvPr/>
         </p:nvPicPr>
         <p:blipFill>
-          <a:blip r:embed="rId4"/>
+          <a:blip r:embed="rId6"/>
           <a:stretch>
             <a:fillRect/>
           </a:stretch>
@@ -7365,7 +7575,7 @@
           <a:bodyPr wrap="square" lIns="0" tIns="0" rIns="0" bIns="0" rtlCol="0" anchor="t"/>
           <a:lstStyle/>
           <a:p>
-            <a:pPr indent="0" marL="0">
+            <a:pPr marL="0" indent="0">
               <a:buNone/>
             </a:pPr>
             <a:r>
@@ -7404,7 +7614,7 @@
           <a:bodyPr wrap="square" lIns="0" tIns="0" rIns="0" bIns="0" rtlCol="0" anchor="t"/>
           <a:lstStyle/>
           <a:p>
-            <a:pPr indent="0" marL="0">
+            <a:pPr marL="0" indent="0">
               <a:buNone/>
             </a:pPr>
             <a:r>
@@ -7438,6 +7648,7 @@
         <a:solidFill>
           <a:srgbClr val="FFFFFF"/>
         </a:solidFill>
+        <a:effectLst/>
       </p:bgPr>
     </p:bg>
     <p:spTree>
@@ -7475,7 +7686,7 @@
           <a:bodyPr wrap="square" lIns="0" tIns="0" rIns="0" bIns="0" rtlCol="0" anchor="ctr"/>
           <a:lstStyle/>
           <a:p>
-            <a:pPr indent="0" marL="0">
+            <a:pPr marL="0" indent="0">
               <a:buNone/>
             </a:pPr>
             <a:r>
@@ -7514,7 +7725,7 @@
           <a:bodyPr wrap="square" lIns="0" tIns="0" rIns="0" bIns="0" rtlCol="0" anchor="t"/>
           <a:lstStyle/>
           <a:p>
-            <a:pPr indent="0" marL="0">
+            <a:pPr marL="0" indent="0">
               <a:buNone/>
             </a:pPr>
             <a:r>
@@ -7558,6 +7769,13 @@
             <a:prstDash val="solid"/>
           </a:ln>
         </p:spPr>
+        <p:txBody>
+          <a:bodyPr/>
+          <a:lstStyle/>
+          <a:p>
+            <a:endParaRPr lang="es-PE"/>
+          </a:p>
+        </p:txBody>
       </p:sp>
       <p:sp>
         <p:nvSpPr>
@@ -7583,17 +7801,24 @@
             <a:prstDash val="solid"/>
           </a:ln>
         </p:spPr>
+        <p:txBody>
+          <a:bodyPr/>
+          <a:lstStyle/>
+          <a:p>
+            <a:endParaRPr lang="es-PE"/>
+          </a:p>
+        </p:txBody>
       </p:sp>
       <p:pic>
         <p:nvPicPr>
-          <p:cNvPr id="6" name="Image 0" descr="preencoded.png">    </p:cNvPr>
+          <p:cNvPr id="6" name="Image 0" descr="preencoded.png"/>
           <p:cNvPicPr>
             <a:picLocks noChangeAspect="1"/>
           </p:cNvPicPr>
           <p:nvPr/>
         </p:nvPicPr>
         <p:blipFill>
-          <a:blip r:embed="rId1"/>
+          <a:blip r:embed="rId3"/>
           <a:stretch>
             <a:fillRect/>
           </a:stretch>
@@ -7629,7 +7854,7 @@
           <a:bodyPr wrap="square" lIns="0" tIns="0" rIns="0" bIns="0" rtlCol="0" anchor="t"/>
           <a:lstStyle/>
           <a:p>
-            <a:pPr indent="0" marL="0">
+            <a:pPr marL="0" indent="0">
               <a:buNone/>
             </a:pPr>
             <a:r>
@@ -7668,7 +7893,7 @@
           <a:bodyPr wrap="square" lIns="0" tIns="0" rIns="0" bIns="0" rtlCol="0" anchor="t"/>
           <a:lstStyle/>
           <a:p>
-            <a:pPr indent="0" marL="0">
+            <a:pPr marL="0" indent="0">
               <a:buNone/>
             </a:pPr>
             <a:r>
@@ -7712,6 +7937,13 @@
             <a:prstDash val="solid"/>
           </a:ln>
         </p:spPr>
+        <p:txBody>
+          <a:bodyPr/>
+          <a:lstStyle/>
+          <a:p>
+            <a:endParaRPr lang="es-PE"/>
+          </a:p>
+        </p:txBody>
       </p:sp>
       <p:sp>
         <p:nvSpPr>
@@ -7737,17 +7969,24 @@
             <a:prstDash val="solid"/>
           </a:ln>
         </p:spPr>
+        <p:txBody>
+          <a:bodyPr/>
+          <a:lstStyle/>
+          <a:p>
+            <a:endParaRPr lang="es-PE"/>
+          </a:p>
+        </p:txBody>
       </p:sp>
       <p:pic>
         <p:nvPicPr>
-          <p:cNvPr id="11" name="Image 1" descr="preencoded.png">    </p:cNvPr>
+          <p:cNvPr id="11" name="Image 1" descr="preencoded.png"/>
           <p:cNvPicPr>
             <a:picLocks noChangeAspect="1"/>
           </p:cNvPicPr>
           <p:nvPr/>
         </p:nvPicPr>
         <p:blipFill>
-          <a:blip r:embed="rId2"/>
+          <a:blip r:embed="rId4"/>
           <a:stretch>
             <a:fillRect/>
           </a:stretch>
@@ -7783,7 +8022,7 @@
           <a:bodyPr wrap="square" lIns="0" tIns="0" rIns="0" bIns="0" rtlCol="0" anchor="t"/>
           <a:lstStyle/>
           <a:p>
-            <a:pPr indent="0" marL="0">
+            <a:pPr marL="0" indent="0">
               <a:buNone/>
             </a:pPr>
             <a:r>
@@ -7822,7 +8061,7 @@
           <a:bodyPr wrap="square" lIns="0" tIns="0" rIns="0" bIns="0" rtlCol="0" anchor="t"/>
           <a:lstStyle/>
           <a:p>
-            <a:pPr indent="0" marL="0">
+            <a:pPr marL="0" indent="0">
               <a:buNone/>
             </a:pPr>
             <a:r>
@@ -7866,6 +8105,13 @@
             <a:prstDash val="solid"/>
           </a:ln>
         </p:spPr>
+        <p:txBody>
+          <a:bodyPr/>
+          <a:lstStyle/>
+          <a:p>
+            <a:endParaRPr lang="es-PE"/>
+          </a:p>
+        </p:txBody>
       </p:sp>
       <p:sp>
         <p:nvSpPr>
@@ -7891,17 +8137,24 @@
             <a:prstDash val="solid"/>
           </a:ln>
         </p:spPr>
+        <p:txBody>
+          <a:bodyPr/>
+          <a:lstStyle/>
+          <a:p>
+            <a:endParaRPr lang="es-PE"/>
+          </a:p>
+        </p:txBody>
       </p:sp>
       <p:pic>
         <p:nvPicPr>
-          <p:cNvPr id="16" name="Image 2" descr="preencoded.png">    </p:cNvPr>
+          <p:cNvPr id="16" name="Image 2" descr="preencoded.png"/>
           <p:cNvPicPr>
             <a:picLocks noChangeAspect="1"/>
           </p:cNvPicPr>
           <p:nvPr/>
         </p:nvPicPr>
         <p:blipFill>
-          <a:blip r:embed="rId3"/>
+          <a:blip r:embed="rId5"/>
           <a:stretch>
             <a:fillRect/>
           </a:stretch>
@@ -7937,7 +8190,7 @@
           <a:bodyPr wrap="square" lIns="0" tIns="0" rIns="0" bIns="0" rtlCol="0" anchor="t"/>
           <a:lstStyle/>
           <a:p>
-            <a:pPr indent="0" marL="0">
+            <a:pPr marL="0" indent="0">
               <a:buNone/>
             </a:pPr>
             <a:r>
@@ -7976,7 +8229,7 @@
           <a:bodyPr wrap="square" lIns="0" tIns="0" rIns="0" bIns="0" rtlCol="0" anchor="t"/>
           <a:lstStyle/>
           <a:p>
-            <a:pPr indent="0" marL="0">
+            <a:pPr marL="0" indent="0">
               <a:buNone/>
             </a:pPr>
             <a:r>
@@ -8020,6 +8273,13 @@
             <a:prstDash val="solid"/>
           </a:ln>
         </p:spPr>
+        <p:txBody>
+          <a:bodyPr/>
+          <a:lstStyle/>
+          <a:p>
+            <a:endParaRPr lang="es-PE"/>
+          </a:p>
+        </p:txBody>
       </p:sp>
       <p:sp>
         <p:nvSpPr>
@@ -8045,17 +8305,24 @@
             <a:prstDash val="solid"/>
           </a:ln>
         </p:spPr>
+        <p:txBody>
+          <a:bodyPr/>
+          <a:lstStyle/>
+          <a:p>
+            <a:endParaRPr lang="es-PE"/>
+          </a:p>
+        </p:txBody>
       </p:sp>
       <p:pic>
         <p:nvPicPr>
-          <p:cNvPr id="21" name="Image 3" descr="preencoded.png">    </p:cNvPr>
+          <p:cNvPr id="21" name="Image 3" descr="preencoded.png"/>
           <p:cNvPicPr>
             <a:picLocks noChangeAspect="1"/>
           </p:cNvPicPr>
           <p:nvPr/>
         </p:nvPicPr>
         <p:blipFill>
-          <a:blip r:embed="rId4"/>
+          <a:blip r:embed="rId6"/>
           <a:stretch>
             <a:fillRect/>
           </a:stretch>
@@ -8091,7 +8358,7 @@
           <a:bodyPr wrap="square" lIns="0" tIns="0" rIns="0" bIns="0" rtlCol="0" anchor="t"/>
           <a:lstStyle/>
           <a:p>
-            <a:pPr indent="0" marL="0">
+            <a:pPr marL="0" indent="0">
               <a:buNone/>
             </a:pPr>
             <a:r>
@@ -8130,7 +8397,7 @@
           <a:bodyPr wrap="square" lIns="0" tIns="0" rIns="0" bIns="0" rtlCol="0" anchor="t"/>
           <a:lstStyle/>
           <a:p>
-            <a:pPr indent="0" marL="0">
+            <a:pPr marL="0" indent="0">
               <a:buNone/>
             </a:pPr>
             <a:r>
@@ -8164,6 +8431,7 @@
         <a:solidFill>
           <a:srgbClr val="FFFFFF"/>
         </a:solidFill>
+        <a:effectLst/>
       </p:bgPr>
     </p:bg>
     <p:spTree>
@@ -8182,14 +8450,14 @@
       </p:grpSpPr>
       <p:pic>
         <p:nvPicPr>
-          <p:cNvPr id="2" name="Image 0" descr="diagrama.png">    </p:cNvPr>
+          <p:cNvPr id="2" name="Image 0" descr="diagrama.png"/>
           <p:cNvPicPr>
             <a:picLocks noChangeAspect="1"/>
           </p:cNvPicPr>
           <p:nvPr/>
         </p:nvPicPr>
         <p:blipFill>
-          <a:blip r:embed="rId1"/>
+          <a:blip r:embed="rId3"/>
           <a:stretch>
             <a:fillRect/>
           </a:stretch>
@@ -8225,7 +8493,7 @@
           <a:bodyPr wrap="square" lIns="0" tIns="0" rIns="0" bIns="0" rtlCol="0" anchor="t"/>
           <a:lstStyle/>
           <a:p>
-            <a:pPr indent="0" marL="0">
+            <a:pPr marL="0" indent="0">
               <a:buNone/>
             </a:pPr>
             <a:r>
@@ -8269,6 +8537,13 @@
             <a:prstDash val="solid"/>
           </a:ln>
         </p:spPr>
+        <p:txBody>
+          <a:bodyPr/>
+          <a:lstStyle/>
+          <a:p>
+            <a:endParaRPr lang="es-PE"/>
+          </a:p>
+        </p:txBody>
       </p:sp>
       <p:sp>
         <p:nvSpPr>
@@ -8291,7 +8566,7 @@
           <a:bodyPr wrap="square" lIns="0" tIns="0" rIns="0" bIns="0" rtlCol="0" anchor="ctr"/>
           <a:lstStyle/>
           <a:p>
-            <a:pPr indent="0" marL="0">
+            <a:pPr marL="0" indent="0">
               <a:buNone/>
             </a:pPr>
             <a:r>
@@ -8330,7 +8605,7 @@
           <a:bodyPr wrap="square" lIns="0" tIns="0" rIns="0" bIns="0" rtlCol="0" anchor="ctr"/>
           <a:lstStyle/>
           <a:p>
-            <a:pPr indent="0" marL="0">
+            <a:pPr marL="0" indent="0">
               <a:buNone/>
             </a:pPr>
             <a:r>
@@ -8374,6 +8649,13 @@
             <a:prstDash val="solid"/>
           </a:ln>
         </p:spPr>
+        <p:txBody>
+          <a:bodyPr/>
+          <a:lstStyle/>
+          <a:p>
+            <a:endParaRPr lang="es-PE"/>
+          </a:p>
+        </p:txBody>
       </p:sp>
       <p:sp>
         <p:nvSpPr>
@@ -8396,7 +8678,7 @@
           <a:bodyPr wrap="square" lIns="0" tIns="0" rIns="0" bIns="0" rtlCol="0" anchor="ctr"/>
           <a:lstStyle/>
           <a:p>
-            <a:pPr indent="0" marL="0">
+            <a:pPr marL="0" indent="0">
               <a:buNone/>
             </a:pPr>
             <a:r>
@@ -8435,7 +8717,7 @@
           <a:bodyPr wrap="square" lIns="0" tIns="0" rIns="0" bIns="0" rtlCol="0" anchor="ctr"/>
           <a:lstStyle/>
           <a:p>
-            <a:pPr indent="0" marL="0">
+            <a:pPr marL="0" indent="0">
               <a:buNone/>
             </a:pPr>
             <a:r>
@@ -8447,7 +8729,18 @@
                 <a:ea typeface="Calibri" pitchFamily="34" charset="-122"/>
                 <a:cs typeface="Calibri" pitchFamily="34" charset="-120"/>
               </a:rPr>
-              <a:t>contenedores de observabilidad</a:t>
+              <a:t>contenedores de </a:t>
+            </a:r>
+            <a:r>
+              <a:rPr lang="en-US" sz="1100" dirty="0" err="1">
+                <a:solidFill>
+                  <a:srgbClr val="5B6B82"/>
+                </a:solidFill>
+                <a:latin typeface="Calibri" pitchFamily="34" charset="0"/>
+                <a:ea typeface="Calibri" pitchFamily="34" charset="-122"/>
+                <a:cs typeface="Calibri" pitchFamily="34" charset="-120"/>
+              </a:rPr>
+              <a:t>observabilidad</a:t>
             </a:r>
             <a:endParaRPr lang="en-US" sz="1100" dirty="0"/>
           </a:p>
@@ -8479,6 +8772,13 @@
             <a:prstDash val="solid"/>
           </a:ln>
         </p:spPr>
+        <p:txBody>
+          <a:bodyPr/>
+          <a:lstStyle/>
+          <a:p>
+            <a:endParaRPr lang="es-PE"/>
+          </a:p>
+        </p:txBody>
       </p:sp>
       <p:sp>
         <p:nvSpPr>
@@ -8501,7 +8801,7 @@
           <a:bodyPr wrap="square" lIns="0" tIns="0" rIns="0" bIns="0" rtlCol="0" anchor="ctr"/>
           <a:lstStyle/>
           <a:p>
-            <a:pPr indent="0" marL="0">
+            <a:pPr marL="0" indent="0">
               <a:buNone/>
             </a:pPr>
             <a:r>
@@ -8540,7 +8840,7 @@
           <a:bodyPr wrap="square" lIns="0" tIns="0" rIns="0" bIns="0" rtlCol="0" anchor="ctr"/>
           <a:lstStyle/>
           <a:p>
-            <a:pPr indent="0" marL="0">
+            <a:pPr marL="0" indent="0">
               <a:buNone/>
             </a:pPr>
             <a:r>
@@ -8574,6 +8874,7 @@
         <a:solidFill>
           <a:srgbClr val="FFFFFF"/>
         </a:solidFill>
+        <a:effectLst/>
       </p:bgPr>
     </p:bg>
     <p:spTree>
@@ -8611,7 +8912,7 @@
           <a:bodyPr wrap="square" lIns="0" tIns="0" rIns="0" bIns="0" rtlCol="0" anchor="ctr"/>
           <a:lstStyle/>
           <a:p>
-            <a:pPr indent="0" marL="0">
+            <a:pPr marL="0" indent="0">
               <a:buNone/>
             </a:pPr>
             <a:r>
@@ -8645,15 +8946,27 @@
         </p:nvGraphicFramePr>
         <p:xfrm>
           <a:off x="457200" y="1280160"/>
-          <a:ext cx="4206240" cy="914400"/>
+          <a:ext cx="4206240" cy="2514600"/>
         </p:xfrm>
         <a:graphic>
           <a:graphicData uri="http://schemas.openxmlformats.org/drawingml/2006/table">
             <a:tbl>
               <a:tblPr/>
               <a:tblGrid>
-                <a:gridCol w="1920240"/>
-                <a:gridCol w="2286000"/>
+                <a:gridCol w="1920240">
+                  <a:extLst>
+                    <a:ext uri="{9D8B030D-6E8A-4147-A177-3AD203B41FA5}">
+                      <a16:colId xmlns:a16="http://schemas.microsoft.com/office/drawing/2014/main" val="20000"/>
+                    </a:ext>
+                  </a:extLst>
+                </a:gridCol>
+                <a:gridCol w="2286000">
+                  <a:extLst>
+                    <a:ext uri="{9D8B030D-6E8A-4147-A177-3AD203B41FA5}">
+                      <a16:colId xmlns:a16="http://schemas.microsoft.com/office/drawing/2014/main" val="20001"/>
+                    </a:ext>
+                  </a:extLst>
+                </a:gridCol>
               </a:tblGrid>
               <a:tr h="502920">
                 <a:tc>
@@ -8661,7 +8974,7 @@
                     <a:bodyPr/>
                     <a:lstStyle/>
                     <a:p>
-                      <a:pPr indent="0" marL="0">
+                      <a:pPr marL="0" indent="0">
                         <a:buNone/>
                       </a:pPr>
                       <a:r>
@@ -8729,7 +9042,7 @@
                     <a:bodyPr/>
                     <a:lstStyle/>
                     <a:p>
-                      <a:pPr indent="0" marL="0">
+                      <a:pPr marL="0" indent="0">
                         <a:buNone/>
                       </a:pPr>
                       <a:r>
@@ -8792,6 +9105,11 @@
                     </a:solidFill>
                   </a:tcPr>
                 </a:tc>
+                <a:extLst>
+                  <a:ext uri="{0D108BD9-81ED-4DB2-BD59-A6C34878D82A}">
+                    <a16:rowId xmlns:a16="http://schemas.microsoft.com/office/drawing/2014/main" val="10000"/>
+                  </a:ext>
+                </a:extLst>
               </a:tr>
               <a:tr h="502920">
                 <a:tc>
@@ -8799,7 +9117,7 @@
                     <a:bodyPr/>
                     <a:lstStyle/>
                     <a:p>
-                      <a:pPr indent="0" marL="0">
+                      <a:pPr marL="0" indent="0">
                         <a:buNone/>
                       </a:pPr>
                       <a:r>
@@ -8867,7 +9185,7 @@
                     <a:bodyPr/>
                     <a:lstStyle/>
                     <a:p>
-                      <a:pPr indent="0" marL="0">
+                      <a:pPr marL="0" indent="0">
                         <a:buNone/>
                       </a:pPr>
                       <a:r>
@@ -8930,6 +9248,11 @@
                     </a:solidFill>
                   </a:tcPr>
                 </a:tc>
+                <a:extLst>
+                  <a:ext uri="{0D108BD9-81ED-4DB2-BD59-A6C34878D82A}">
+                    <a16:rowId xmlns:a16="http://schemas.microsoft.com/office/drawing/2014/main" val="10001"/>
+                  </a:ext>
+                </a:extLst>
               </a:tr>
               <a:tr h="502920">
                 <a:tc>
@@ -8937,7 +9260,7 @@
                     <a:bodyPr/>
                     <a:lstStyle/>
                     <a:p>
-                      <a:pPr indent="0" marL="0">
+                      <a:pPr marL="0" indent="0">
                         <a:buNone/>
                       </a:pPr>
                       <a:r>
@@ -9005,7 +9328,7 @@
                     <a:bodyPr/>
                     <a:lstStyle/>
                     <a:p>
-                      <a:pPr indent="0" marL="0">
+                      <a:pPr marL="0" indent="0">
                         <a:buNone/>
                       </a:pPr>
                       <a:r>
@@ -9068,6 +9391,11 @@
                     </a:solidFill>
                   </a:tcPr>
                 </a:tc>
+                <a:extLst>
+                  <a:ext uri="{0D108BD9-81ED-4DB2-BD59-A6C34878D82A}">
+                    <a16:rowId xmlns:a16="http://schemas.microsoft.com/office/drawing/2014/main" val="10002"/>
+                  </a:ext>
+                </a:extLst>
               </a:tr>
               <a:tr h="502920">
                 <a:tc>
@@ -9075,7 +9403,7 @@
                     <a:bodyPr/>
                     <a:lstStyle/>
                     <a:p>
-                      <a:pPr indent="0" marL="0">
+                      <a:pPr marL="0" indent="0">
                         <a:buNone/>
                       </a:pPr>
                       <a:r>
@@ -9143,7 +9471,7 @@
                     <a:bodyPr/>
                     <a:lstStyle/>
                     <a:p>
-                      <a:pPr indent="0" marL="0">
+                      <a:pPr marL="0" indent="0">
                         <a:buNone/>
                       </a:pPr>
                       <a:r>
@@ -9206,6 +9534,11 @@
                     </a:solidFill>
                   </a:tcPr>
                 </a:tc>
+                <a:extLst>
+                  <a:ext uri="{0D108BD9-81ED-4DB2-BD59-A6C34878D82A}">
+                    <a16:rowId xmlns:a16="http://schemas.microsoft.com/office/drawing/2014/main" val="10003"/>
+                  </a:ext>
+                </a:extLst>
               </a:tr>
               <a:tr h="502920">
                 <a:tc>
@@ -9213,7 +9546,7 @@
                     <a:bodyPr/>
                     <a:lstStyle/>
                     <a:p>
-                      <a:pPr indent="0" marL="0">
+                      <a:pPr marL="0" indent="0">
                         <a:buNone/>
                       </a:pPr>
                       <a:r>
@@ -9281,7 +9614,7 @@
                     <a:bodyPr/>
                     <a:lstStyle/>
                     <a:p>
-                      <a:pPr indent="0" marL="0">
+                      <a:pPr marL="0" indent="0">
                         <a:buNone/>
                       </a:pPr>
                       <a:r>
@@ -9344,6 +9677,11 @@
                     </a:solidFill>
                   </a:tcPr>
                 </a:tc>
+                <a:extLst>
+                  <a:ext uri="{0D108BD9-81ED-4DB2-BD59-A6C34878D82A}">
+                    <a16:rowId xmlns:a16="http://schemas.microsoft.com/office/drawing/2014/main" val="10004"/>
+                  </a:ext>
+                </a:extLst>
               </a:tr>
             </a:tbl>
           </a:graphicData>
@@ -9370,7 +9708,7 @@
           <a:bodyPr wrap="square" lIns="0" tIns="0" rIns="0" bIns="0" rtlCol="0" anchor="t"/>
           <a:lstStyle/>
           <a:p>
-            <a:pPr indent="0" marL="0">
+            <a:pPr marL="0" indent="0">
               <a:buNone/>
             </a:pPr>
             <a:r>
@@ -9390,7 +9728,7 @@
       </p:sp>
       <p:sp>
         <p:nvSpPr>
-          <p:cNvPr id="5" name="Shape 2"/>
+          <p:cNvPr id="3" name="Shape 2"/>
           <p:cNvSpPr/>
           <p:nvPr/>
         </p:nvSpPr>
@@ -9414,6 +9752,13 @@
             <a:prstDash val="solid"/>
           </a:ln>
         </p:spPr>
+        <p:txBody>
+          <a:bodyPr/>
+          <a:lstStyle/>
+          <a:p>
+            <a:endParaRPr lang="es-PE"/>
+          </a:p>
+        </p:txBody>
       </p:sp>
       <p:sp>
         <p:nvSpPr>
@@ -9439,17 +9784,24 @@
             <a:prstDash val="solid"/>
           </a:ln>
         </p:spPr>
+        <p:txBody>
+          <a:bodyPr/>
+          <a:lstStyle/>
+          <a:p>
+            <a:endParaRPr lang="es-PE"/>
+          </a:p>
+        </p:txBody>
       </p:sp>
       <p:pic>
         <p:nvPicPr>
-          <p:cNvPr id="7" name="Image 0" descr="preencoded.png">    </p:cNvPr>
+          <p:cNvPr id="7" name="Image 0" descr="preencoded.png"/>
           <p:cNvPicPr>
             <a:picLocks noChangeAspect="1"/>
           </p:cNvPicPr>
           <p:nvPr/>
         </p:nvPicPr>
         <p:blipFill>
-          <a:blip r:embed="rId1"/>
+          <a:blip r:embed="rId3"/>
           <a:stretch>
             <a:fillRect/>
           </a:stretch>
@@ -9485,7 +9837,7 @@
           <a:bodyPr wrap="square" lIns="0" tIns="0" rIns="0" bIns="0" rtlCol="0" anchor="t"/>
           <a:lstStyle/>
           <a:p>
-            <a:pPr indent="0" marL="0">
+            <a:pPr marL="0" indent="0">
               <a:buNone/>
             </a:pPr>
             <a:r>
@@ -9524,7 +9876,7 @@
           <a:bodyPr wrap="square" lIns="0" tIns="0" rIns="0" bIns="0" rtlCol="0" anchor="t"/>
           <a:lstStyle/>
           <a:p>
-            <a:pPr indent="0" marL="0">
+            <a:pPr marL="0" indent="0">
               <a:buNone/>
             </a:pPr>
             <a:r>
@@ -9568,6 +9920,13 @@
             <a:prstDash val="solid"/>
           </a:ln>
         </p:spPr>
+        <p:txBody>
+          <a:bodyPr/>
+          <a:lstStyle/>
+          <a:p>
+            <a:endParaRPr lang="es-PE"/>
+          </a:p>
+        </p:txBody>
       </p:sp>
       <p:sp>
         <p:nvSpPr>
@@ -9593,17 +9952,24 @@
             <a:prstDash val="solid"/>
           </a:ln>
         </p:spPr>
+        <p:txBody>
+          <a:bodyPr/>
+          <a:lstStyle/>
+          <a:p>
+            <a:endParaRPr lang="es-PE"/>
+          </a:p>
+        </p:txBody>
       </p:sp>
       <p:pic>
         <p:nvPicPr>
-          <p:cNvPr id="12" name="Image 1" descr="preencoded.png">    </p:cNvPr>
+          <p:cNvPr id="12" name="Image 1" descr="preencoded.png"/>
           <p:cNvPicPr>
             <a:picLocks noChangeAspect="1"/>
           </p:cNvPicPr>
           <p:nvPr/>
         </p:nvPicPr>
         <p:blipFill>
-          <a:blip r:embed="rId2"/>
+          <a:blip r:embed="rId4"/>
           <a:stretch>
             <a:fillRect/>
           </a:stretch>
@@ -9639,7 +10005,7 @@
           <a:bodyPr wrap="square" lIns="0" tIns="0" rIns="0" bIns="0" rtlCol="0" anchor="t"/>
           <a:lstStyle/>
           <a:p>
-            <a:pPr indent="0" marL="0">
+            <a:pPr marL="0" indent="0">
               <a:buNone/>
             </a:pPr>
             <a:r>
@@ -9678,7 +10044,7 @@
           <a:bodyPr wrap="square" lIns="0" tIns="0" rIns="0" bIns="0" rtlCol="0" anchor="t"/>
           <a:lstStyle/>
           <a:p>
-            <a:pPr indent="0" marL="0">
+            <a:pPr marL="0" indent="0">
               <a:buNone/>
             </a:pPr>
             <a:r>
@@ -9722,6 +10088,13 @@
             <a:prstDash val="solid"/>
           </a:ln>
         </p:spPr>
+        <p:txBody>
+          <a:bodyPr/>
+          <a:lstStyle/>
+          <a:p>
+            <a:endParaRPr lang="es-PE"/>
+          </a:p>
+        </p:txBody>
       </p:sp>
       <p:sp>
         <p:nvSpPr>
@@ -9747,17 +10120,24 @@
             <a:prstDash val="solid"/>
           </a:ln>
         </p:spPr>
+        <p:txBody>
+          <a:bodyPr/>
+          <a:lstStyle/>
+          <a:p>
+            <a:endParaRPr lang="es-PE"/>
+          </a:p>
+        </p:txBody>
       </p:sp>
       <p:pic>
         <p:nvPicPr>
-          <p:cNvPr id="17" name="Image 2" descr="preencoded.png">    </p:cNvPr>
+          <p:cNvPr id="17" name="Image 2" descr="preencoded.png"/>
           <p:cNvPicPr>
             <a:picLocks noChangeAspect="1"/>
           </p:cNvPicPr>
           <p:nvPr/>
         </p:nvPicPr>
         <p:blipFill>
-          <a:blip r:embed="rId3"/>
+          <a:blip r:embed="rId5"/>
           <a:stretch>
             <a:fillRect/>
           </a:stretch>
@@ -9793,7 +10173,7 @@
           <a:bodyPr wrap="square" lIns="0" tIns="0" rIns="0" bIns="0" rtlCol="0" anchor="t"/>
           <a:lstStyle/>
           <a:p>
-            <a:pPr indent="0" marL="0">
+            <a:pPr marL="0" indent="0">
               <a:buNone/>
             </a:pPr>
             <a:r>
@@ -9832,7 +10212,7 @@
           <a:bodyPr wrap="square" lIns="0" tIns="0" rIns="0" bIns="0" rtlCol="0" anchor="t"/>
           <a:lstStyle/>
           <a:p>
-            <a:pPr indent="0" marL="0">
+            <a:pPr marL="0" indent="0">
               <a:buNone/>
             </a:pPr>
             <a:r>
@@ -9866,6 +10246,7 @@
         <a:solidFill>
           <a:srgbClr val="FFFFFF"/>
         </a:solidFill>
+        <a:effectLst/>
       </p:bgPr>
     </p:bg>
     <p:spTree>
@@ -9903,7 +10284,7 @@
           <a:bodyPr wrap="square" lIns="0" tIns="0" rIns="0" bIns="0" rtlCol="0" anchor="ctr"/>
           <a:lstStyle/>
           <a:p>
-            <a:pPr indent="0" marL="0">
+            <a:pPr marL="0" indent="0">
               <a:buNone/>
             </a:pPr>
             <a:r>
@@ -9947,6 +10328,13 @@
             <a:prstDash val="solid"/>
           </a:ln>
         </p:spPr>
+        <p:txBody>
+          <a:bodyPr/>
+          <a:lstStyle/>
+          <a:p>
+            <a:endParaRPr lang="es-PE"/>
+          </a:p>
+        </p:txBody>
       </p:sp>
       <p:sp>
         <p:nvSpPr>
@@ -9972,17 +10360,24 @@
             <a:prstDash val="solid"/>
           </a:ln>
         </p:spPr>
+        <p:txBody>
+          <a:bodyPr/>
+          <a:lstStyle/>
+          <a:p>
+            <a:endParaRPr lang="es-PE"/>
+          </a:p>
+        </p:txBody>
       </p:sp>
       <p:pic>
         <p:nvPicPr>
-          <p:cNvPr id="5" name="Image 0" descr="preencoded.png">    </p:cNvPr>
+          <p:cNvPr id="5" name="Image 0" descr="preencoded.png"/>
           <p:cNvPicPr>
             <a:picLocks noChangeAspect="1"/>
           </p:cNvPicPr>
           <p:nvPr/>
         </p:nvPicPr>
         <p:blipFill>
-          <a:blip r:embed="rId1"/>
+          <a:blip r:embed="rId3"/>
           <a:stretch>
             <a:fillRect/>
           </a:stretch>
@@ -10018,7 +10413,7 @@
           <a:bodyPr wrap="square" lIns="0" tIns="0" rIns="0" bIns="0" rtlCol="0" anchor="ctr"/>
           <a:lstStyle/>
           <a:p>
-            <a:pPr indent="0" marL="0">
+            <a:pPr marL="0" indent="0">
               <a:buNone/>
             </a:pPr>
             <a:r>
@@ -10057,7 +10452,7 @@
           <a:bodyPr wrap="square" lIns="0" tIns="0" rIns="0" bIns="0" rtlCol="0" anchor="t"/>
           <a:lstStyle/>
           <a:p>
-            <a:pPr indent="0" marL="0">
+            <a:pPr marL="0" indent="0">
               <a:buNone/>
             </a:pPr>
             <a:r>
@@ -10101,6 +10496,13 @@
             <a:prstDash val="solid"/>
           </a:ln>
         </p:spPr>
+        <p:txBody>
+          <a:bodyPr/>
+          <a:lstStyle/>
+          <a:p>
+            <a:endParaRPr lang="es-PE"/>
+          </a:p>
+        </p:txBody>
       </p:sp>
       <p:sp>
         <p:nvSpPr>
@@ -10126,17 +10528,24 @@
             <a:prstDash val="solid"/>
           </a:ln>
         </p:spPr>
+        <p:txBody>
+          <a:bodyPr/>
+          <a:lstStyle/>
+          <a:p>
+            <a:endParaRPr lang="es-PE"/>
+          </a:p>
+        </p:txBody>
       </p:sp>
       <p:pic>
         <p:nvPicPr>
-          <p:cNvPr id="10" name="Image 1" descr="preencoded.png">    </p:cNvPr>
+          <p:cNvPr id="10" name="Image 1" descr="preencoded.png"/>
           <p:cNvPicPr>
             <a:picLocks noChangeAspect="1"/>
           </p:cNvPicPr>
           <p:nvPr/>
         </p:nvPicPr>
         <p:blipFill>
-          <a:blip r:embed="rId2"/>
+          <a:blip r:embed="rId4"/>
           <a:stretch>
             <a:fillRect/>
           </a:stretch>
@@ -10172,7 +10581,7 @@
           <a:bodyPr wrap="square" lIns="0" tIns="0" rIns="0" bIns="0" rtlCol="0" anchor="ctr"/>
           <a:lstStyle/>
           <a:p>
-            <a:pPr indent="0" marL="0">
+            <a:pPr marL="0" indent="0">
               <a:buNone/>
             </a:pPr>
             <a:r>
@@ -10211,7 +10620,7 @@
           <a:bodyPr wrap="square" lIns="0" tIns="0" rIns="0" bIns="0" rtlCol="0" anchor="t"/>
           <a:lstStyle/>
           <a:p>
-            <a:pPr indent="0" marL="0">
+            <a:pPr marL="0" indent="0">
               <a:buNone/>
             </a:pPr>
             <a:r>
@@ -10255,6 +10664,13 @@
             <a:prstDash val="solid"/>
           </a:ln>
         </p:spPr>
+        <p:txBody>
+          <a:bodyPr/>
+          <a:lstStyle/>
+          <a:p>
+            <a:endParaRPr lang="es-PE"/>
+          </a:p>
+        </p:txBody>
       </p:sp>
       <p:sp>
         <p:nvSpPr>
@@ -10280,17 +10696,24 @@
             <a:prstDash val="solid"/>
           </a:ln>
         </p:spPr>
+        <p:txBody>
+          <a:bodyPr/>
+          <a:lstStyle/>
+          <a:p>
+            <a:endParaRPr lang="es-PE"/>
+          </a:p>
+        </p:txBody>
       </p:sp>
       <p:pic>
         <p:nvPicPr>
-          <p:cNvPr id="15" name="Image 2" descr="preencoded.png">    </p:cNvPr>
+          <p:cNvPr id="15" name="Image 2" descr="preencoded.png"/>
           <p:cNvPicPr>
             <a:picLocks noChangeAspect="1"/>
           </p:cNvPicPr>
           <p:nvPr/>
         </p:nvPicPr>
         <p:blipFill>
-          <a:blip r:embed="rId3"/>
+          <a:blip r:embed="rId5"/>
           <a:stretch>
             <a:fillRect/>
           </a:stretch>
@@ -10326,7 +10749,7 @@
           <a:bodyPr wrap="square" lIns="0" tIns="0" rIns="0" bIns="0" rtlCol="0" anchor="ctr"/>
           <a:lstStyle/>
           <a:p>
-            <a:pPr indent="0" marL="0">
+            <a:pPr marL="0" indent="0">
               <a:buNone/>
             </a:pPr>
             <a:r>
@@ -10365,7 +10788,7 @@
           <a:bodyPr wrap="square" lIns="0" tIns="0" rIns="0" bIns="0" rtlCol="0" anchor="t"/>
           <a:lstStyle/>
           <a:p>
-            <a:pPr indent="0" marL="0">
+            <a:pPr marL="0" indent="0">
               <a:buNone/>
             </a:pPr>
             <a:r>
@@ -10409,6 +10832,13 @@
             <a:prstDash val="solid"/>
           </a:ln>
         </p:spPr>
+        <p:txBody>
+          <a:bodyPr/>
+          <a:lstStyle/>
+          <a:p>
+            <a:endParaRPr lang="es-PE"/>
+          </a:p>
+        </p:txBody>
       </p:sp>
       <p:sp>
         <p:nvSpPr>
@@ -10434,17 +10864,24 @@
             <a:prstDash val="solid"/>
           </a:ln>
         </p:spPr>
+        <p:txBody>
+          <a:bodyPr/>
+          <a:lstStyle/>
+          <a:p>
+            <a:endParaRPr lang="es-PE"/>
+          </a:p>
+        </p:txBody>
       </p:sp>
       <p:pic>
         <p:nvPicPr>
-          <p:cNvPr id="20" name="Image 3" descr="preencoded.png">    </p:cNvPr>
+          <p:cNvPr id="20" name="Image 3" descr="preencoded.png"/>
           <p:cNvPicPr>
             <a:picLocks noChangeAspect="1"/>
           </p:cNvPicPr>
           <p:nvPr/>
         </p:nvPicPr>
         <p:blipFill>
-          <a:blip r:embed="rId4"/>
+          <a:blip r:embed="rId6"/>
           <a:stretch>
             <a:fillRect/>
           </a:stretch>
@@ -10480,7 +10917,7 @@
           <a:bodyPr wrap="square" lIns="0" tIns="0" rIns="0" bIns="0" rtlCol="0" anchor="ctr"/>
           <a:lstStyle/>
           <a:p>
-            <a:pPr indent="0" marL="0">
+            <a:pPr marL="0" indent="0">
               <a:buNone/>
             </a:pPr>
             <a:r>
@@ -10519,7 +10956,7 @@
           <a:bodyPr wrap="square" lIns="0" tIns="0" rIns="0" bIns="0" rtlCol="0" anchor="t"/>
           <a:lstStyle/>
           <a:p>
-            <a:pPr indent="0" marL="0">
+            <a:pPr marL="0" indent="0">
               <a:buNone/>
             </a:pPr>
             <a:r>
@@ -10563,6 +11000,13 @@
             <a:prstDash val="solid"/>
           </a:ln>
         </p:spPr>
+        <p:txBody>
+          <a:bodyPr/>
+          <a:lstStyle/>
+          <a:p>
+            <a:endParaRPr lang="es-PE"/>
+          </a:p>
+        </p:txBody>
       </p:sp>
       <p:sp>
         <p:nvSpPr>
@@ -10588,17 +11032,24 @@
             <a:prstDash val="solid"/>
           </a:ln>
         </p:spPr>
+        <p:txBody>
+          <a:bodyPr/>
+          <a:lstStyle/>
+          <a:p>
+            <a:endParaRPr lang="es-PE"/>
+          </a:p>
+        </p:txBody>
       </p:sp>
       <p:pic>
         <p:nvPicPr>
-          <p:cNvPr id="25" name="Image 4" descr="preencoded.png">    </p:cNvPr>
+          <p:cNvPr id="25" name="Image 4" descr="preencoded.png"/>
           <p:cNvPicPr>
             <a:picLocks noChangeAspect="1"/>
           </p:cNvPicPr>
           <p:nvPr/>
         </p:nvPicPr>
         <p:blipFill>
-          <a:blip r:embed="rId5"/>
+          <a:blip r:embed="rId7"/>
           <a:stretch>
             <a:fillRect/>
           </a:stretch>
@@ -10634,7 +11085,7 @@
           <a:bodyPr wrap="square" lIns="0" tIns="0" rIns="0" bIns="0" rtlCol="0" anchor="ctr"/>
           <a:lstStyle/>
           <a:p>
-            <a:pPr indent="0" marL="0">
+            <a:pPr marL="0" indent="0">
               <a:buNone/>
             </a:pPr>
             <a:r>
@@ -10673,7 +11124,7 @@
           <a:bodyPr wrap="square" lIns="0" tIns="0" rIns="0" bIns="0" rtlCol="0" anchor="t"/>
           <a:lstStyle/>
           <a:p>
-            <a:pPr indent="0" marL="0">
+            <a:pPr marL="0" indent="0">
               <a:buNone/>
             </a:pPr>
             <a:r>
@@ -10717,6 +11168,13 @@
             <a:prstDash val="solid"/>
           </a:ln>
         </p:spPr>
+        <p:txBody>
+          <a:bodyPr/>
+          <a:lstStyle/>
+          <a:p>
+            <a:endParaRPr lang="es-PE"/>
+          </a:p>
+        </p:txBody>
       </p:sp>
       <p:sp>
         <p:nvSpPr>
@@ -10742,17 +11200,24 @@
             <a:prstDash val="solid"/>
           </a:ln>
         </p:spPr>
+        <p:txBody>
+          <a:bodyPr/>
+          <a:lstStyle/>
+          <a:p>
+            <a:endParaRPr lang="es-PE"/>
+          </a:p>
+        </p:txBody>
       </p:sp>
       <p:pic>
         <p:nvPicPr>
-          <p:cNvPr id="30" name="Image 5" descr="preencoded.png">    </p:cNvPr>
+          <p:cNvPr id="30" name="Image 5" descr="preencoded.png"/>
           <p:cNvPicPr>
             <a:picLocks noChangeAspect="1"/>
           </p:cNvPicPr>
           <p:nvPr/>
         </p:nvPicPr>
         <p:blipFill>
-          <a:blip r:embed="rId6"/>
+          <a:blip r:embed="rId8"/>
           <a:stretch>
             <a:fillRect/>
           </a:stretch>
@@ -10788,7 +11253,7 @@
           <a:bodyPr wrap="square" lIns="0" tIns="0" rIns="0" bIns="0" rtlCol="0" anchor="ctr"/>
           <a:lstStyle/>
           <a:p>
-            <a:pPr indent="0" marL="0">
+            <a:pPr marL="0" indent="0">
               <a:buNone/>
             </a:pPr>
             <a:r>
@@ -10827,7 +11292,7 @@
           <a:bodyPr wrap="square" lIns="0" tIns="0" rIns="0" bIns="0" rtlCol="0" anchor="t"/>
           <a:lstStyle/>
           <a:p>
-            <a:pPr indent="0" marL="0">
+            <a:pPr marL="0" indent="0">
               <a:buNone/>
             </a:pPr>
             <a:r>
@@ -10871,6 +11336,13 @@
             <a:prstDash val="solid"/>
           </a:ln>
         </p:spPr>
+        <p:txBody>
+          <a:bodyPr/>
+          <a:lstStyle/>
+          <a:p>
+            <a:endParaRPr lang="es-PE"/>
+          </a:p>
+        </p:txBody>
       </p:sp>
       <p:sp>
         <p:nvSpPr>
@@ -10893,7 +11365,7 @@
           <a:bodyPr wrap="square" lIns="0" tIns="0" rIns="0" bIns="0" rtlCol="0" anchor="ctr"/>
           <a:lstStyle/>
           <a:p>
-            <a:pPr indent="0" marL="0">
+            <a:pPr marL="0" indent="0">
               <a:buNone/>
             </a:pPr>
             <a:r>
@@ -10927,6 +11399,7 @@
         <a:solidFill>
           <a:srgbClr val="FFFFFF"/>
         </a:solidFill>
+        <a:effectLst/>
       </p:bgPr>
     </p:bg>
     <p:spTree>
@@ -10964,7 +11437,7 @@
           <a:bodyPr wrap="square" lIns="0" tIns="0" rIns="0" bIns="0" rtlCol="0" anchor="ctr"/>
           <a:lstStyle/>
           <a:p>
-            <a:pPr indent="0" marL="0">
+            <a:pPr marL="0" indent="0">
               <a:buNone/>
             </a:pPr>
             <a:r>
@@ -11006,6 +11479,13 @@
             <a:prstDash val="solid"/>
           </a:ln>
         </p:spPr>
+        <p:txBody>
+          <a:bodyPr/>
+          <a:lstStyle/>
+          <a:p>
+            <a:endParaRPr lang="es-PE"/>
+          </a:p>
+        </p:txBody>
       </p:sp>
       <p:sp>
         <p:nvSpPr>
@@ -11031,6 +11511,13 @@
             <a:prstDash val="solid"/>
           </a:ln>
         </p:spPr>
+        <p:txBody>
+          <a:bodyPr/>
+          <a:lstStyle/>
+          <a:p>
+            <a:endParaRPr lang="es-PE"/>
+          </a:p>
+        </p:txBody>
       </p:sp>
       <p:sp>
         <p:nvSpPr>
@@ -11056,6 +11543,13 @@
             <a:prstDash val="solid"/>
           </a:ln>
         </p:spPr>
+        <p:txBody>
+          <a:bodyPr/>
+          <a:lstStyle/>
+          <a:p>
+            <a:endParaRPr lang="es-PE"/>
+          </a:p>
+        </p:txBody>
       </p:sp>
       <p:sp>
         <p:nvSpPr>
@@ -11078,7 +11572,7 @@
           <a:bodyPr wrap="square" lIns="0" tIns="0" rIns="0" bIns="0" rtlCol="0" anchor="t"/>
           <a:lstStyle/>
           <a:p>
-            <a:pPr algn="ctr" indent="0" marL="0">
+            <a:pPr marL="0" indent="0" algn="ctr">
               <a:buNone/>
             </a:pPr>
             <a:r>
@@ -11117,7 +11611,7 @@
           <a:bodyPr wrap="square" lIns="0" tIns="0" rIns="0" bIns="0" rtlCol="0" anchor="t"/>
           <a:lstStyle/>
           <a:p>
-            <a:pPr algn="ctr" indent="0" marL="0">
+            <a:pPr marL="0" indent="0" algn="ctr">
               <a:buNone/>
             </a:pPr>
             <a:r>
@@ -11156,7 +11650,7 @@
           <a:bodyPr wrap="square" lIns="0" tIns="0" rIns="0" bIns="0" rtlCol="0" anchor="t"/>
           <a:lstStyle/>
           <a:p>
-            <a:pPr algn="ctr" indent="0" marL="0">
+            <a:pPr marL="0" indent="0" algn="ctr">
               <a:buNone/>
             </a:pPr>
             <a:r>
@@ -11195,7 +11689,7 @@
           <a:bodyPr wrap="square" lIns="0" tIns="0" rIns="0" bIns="0" rtlCol="0" anchor="t"/>
           <a:lstStyle/>
           <a:p>
-            <a:pPr algn="ctr" indent="0" marL="0">
+            <a:pPr marL="0" indent="0" algn="ctr">
               <a:buNone/>
             </a:pPr>
             <a:r>
@@ -11239,6 +11733,13 @@
             <a:prstDash val="solid"/>
           </a:ln>
         </p:spPr>
+        <p:txBody>
+          <a:bodyPr/>
+          <a:lstStyle/>
+          <a:p>
+            <a:endParaRPr lang="es-PE"/>
+          </a:p>
+        </p:txBody>
       </p:sp>
       <p:sp>
         <p:nvSpPr>
@@ -11261,7 +11762,7 @@
           <a:bodyPr wrap="square" lIns="0" tIns="0" rIns="0" bIns="0" rtlCol="0" anchor="t"/>
           <a:lstStyle/>
           <a:p>
-            <a:pPr indent="0" marL="0">
+            <a:pPr marL="0" indent="0">
               <a:buNone/>
             </a:pPr>
             <a:r>
@@ -11300,7 +11801,7 @@
           <a:bodyPr wrap="square" lIns="0" tIns="0" rIns="0" bIns="0" rtlCol="0" anchor="t"/>
           <a:lstStyle/>
           <a:p>
-            <a:pPr indent="0" marL="0">
+            <a:pPr marL="0" indent="0">
               <a:buNone/>
             </a:pPr>
             <a:r>
@@ -11344,6 +11845,13 @@
             <a:prstDash val="solid"/>
           </a:ln>
         </p:spPr>
+        <p:txBody>
+          <a:bodyPr/>
+          <a:lstStyle/>
+          <a:p>
+            <a:endParaRPr lang="es-PE"/>
+          </a:p>
+        </p:txBody>
       </p:sp>
       <p:sp>
         <p:nvSpPr>
@@ -11366,7 +11874,7 @@
           <a:bodyPr wrap="square" lIns="0" tIns="0" rIns="0" bIns="0" rtlCol="0" anchor="t"/>
           <a:lstStyle/>
           <a:p>
-            <a:pPr indent="0" marL="0">
+            <a:pPr marL="0" indent="0">
               <a:buNone/>
             </a:pPr>
             <a:r>
@@ -11405,7 +11913,7 @@
           <a:bodyPr wrap="square" lIns="0" tIns="0" rIns="0" bIns="0" rtlCol="0" anchor="t"/>
           <a:lstStyle/>
           <a:p>
-            <a:pPr indent="0" marL="0">
+            <a:pPr marL="0" indent="0">
               <a:buNone/>
             </a:pPr>
             <a:r>
@@ -11449,6 +11957,13 @@
             <a:prstDash val="solid"/>
           </a:ln>
         </p:spPr>
+        <p:txBody>
+          <a:bodyPr/>
+          <a:lstStyle/>
+          <a:p>
+            <a:endParaRPr lang="es-PE"/>
+          </a:p>
+        </p:txBody>
       </p:sp>
       <p:sp>
         <p:nvSpPr>
@@ -11471,7 +11986,7 @@
           <a:bodyPr wrap="square" lIns="0" tIns="0" rIns="0" bIns="0" rtlCol="0" anchor="t"/>
           <a:lstStyle/>
           <a:p>
-            <a:pPr indent="0" marL="0">
+            <a:pPr marL="0" indent="0">
               <a:buNone/>
             </a:pPr>
             <a:r>
@@ -11510,7 +12025,7 @@
           <a:bodyPr wrap="square" lIns="0" tIns="0" rIns="0" bIns="0" rtlCol="0" anchor="t"/>
           <a:lstStyle/>
           <a:p>
-            <a:pPr indent="0" marL="0">
+            <a:pPr marL="0" indent="0">
               <a:buNone/>
             </a:pPr>
             <a:r>
@@ -11554,6 +12069,13 @@
             <a:prstDash val="solid"/>
           </a:ln>
         </p:spPr>
+        <p:txBody>
+          <a:bodyPr/>
+          <a:lstStyle/>
+          <a:p>
+            <a:endParaRPr lang="es-PE"/>
+          </a:p>
+        </p:txBody>
       </p:sp>
       <p:sp>
         <p:nvSpPr>
@@ -11576,7 +12098,7 @@
           <a:bodyPr wrap="square" lIns="0" tIns="0" rIns="0" bIns="0" rtlCol="0" anchor="t"/>
           <a:lstStyle/>
           <a:p>
-            <a:pPr indent="0" marL="0">
+            <a:pPr marL="0" indent="0">
               <a:buNone/>
             </a:pPr>
             <a:r>
@@ -11615,7 +12137,7 @@
           <a:bodyPr wrap="square" lIns="0" tIns="0" rIns="0" bIns="0" rtlCol="0" anchor="t"/>
           <a:lstStyle/>
           <a:p>
-            <a:pPr indent="0" marL="0">
+            <a:pPr marL="0" indent="0">
               <a:buNone/>
             </a:pPr>
             <a:r>
@@ -11649,6 +12171,7 @@
         <a:solidFill>
           <a:srgbClr val="FFFFFF"/>
         </a:solidFill>
+        <a:effectLst/>
       </p:bgPr>
     </p:bg>
     <p:spTree>
@@ -11686,7 +12209,7 @@
           <a:bodyPr wrap="square" lIns="0" tIns="0" rIns="0" bIns="0" rtlCol="0" anchor="ctr"/>
           <a:lstStyle/>
           <a:p>
-            <a:pPr indent="0" marL="0">
+            <a:pPr marL="0" indent="0">
               <a:buNone/>
             </a:pPr>
             <a:r>
@@ -11730,6 +12253,13 @@
             <a:prstDash val="solid"/>
           </a:ln>
         </p:spPr>
+        <p:txBody>
+          <a:bodyPr/>
+          <a:lstStyle/>
+          <a:p>
+            <a:endParaRPr lang="es-PE"/>
+          </a:p>
+        </p:txBody>
       </p:sp>
       <p:sp>
         <p:nvSpPr>
@@ -11752,7 +12282,7 @@
           <a:bodyPr wrap="square" lIns="0" tIns="0" rIns="0" bIns="0" rtlCol="0" anchor="ctr"/>
           <a:lstStyle/>
           <a:p>
-            <a:pPr algn="ctr" indent="0" marL="0">
+            <a:pPr marL="0" indent="0" algn="ctr">
               <a:buNone/>
             </a:pPr>
             <a:r>
@@ -11793,6 +12323,13 @@
             <a:tailEnd type="triangle"/>
           </a:ln>
         </p:spPr>
+        <p:txBody>
+          <a:bodyPr/>
+          <a:lstStyle/>
+          <a:p>
+            <a:endParaRPr lang="es-PE"/>
+          </a:p>
+        </p:txBody>
       </p:sp>
       <p:sp>
         <p:nvSpPr>
@@ -11817,6 +12354,13 @@
             <a:tailEnd type="triangle"/>
           </a:ln>
         </p:spPr>
+        <p:txBody>
+          <a:bodyPr/>
+          <a:lstStyle/>
+          <a:p>
+            <a:endParaRPr lang="es-PE"/>
+          </a:p>
+        </p:txBody>
       </p:sp>
       <p:sp>
         <p:nvSpPr>
@@ -11844,6 +12388,13 @@
             <a:prstDash val="solid"/>
           </a:ln>
         </p:spPr>
+        <p:txBody>
+          <a:bodyPr/>
+          <a:lstStyle/>
+          <a:p>
+            <a:endParaRPr lang="es-PE"/>
+          </a:p>
+        </p:txBody>
       </p:sp>
       <p:sp>
         <p:nvSpPr>
@@ -11869,17 +12420,24 @@
             <a:prstDash val="solid"/>
           </a:ln>
         </p:spPr>
+        <p:txBody>
+          <a:bodyPr/>
+          <a:lstStyle/>
+          <a:p>
+            <a:endParaRPr lang="es-PE"/>
+          </a:p>
+        </p:txBody>
       </p:sp>
       <p:pic>
         <p:nvPicPr>
-          <p:cNvPr id="9" name="Image 0" descr="preencoded.png">    </p:cNvPr>
+          <p:cNvPr id="9" name="Image 0" descr="preencoded.png"/>
           <p:cNvPicPr>
             <a:picLocks noChangeAspect="1"/>
           </p:cNvPicPr>
           <p:nvPr/>
         </p:nvPicPr>
         <p:blipFill>
-          <a:blip r:embed="rId1"/>
+          <a:blip r:embed="rId3"/>
           <a:stretch>
             <a:fillRect/>
           </a:stretch>
@@ -11915,7 +12473,7 @@
           <a:bodyPr wrap="square" lIns="0" tIns="0" rIns="0" bIns="0" rtlCol="0" anchor="t"/>
           <a:lstStyle/>
           <a:p>
-            <a:pPr indent="0" marL="0">
+            <a:pPr marL="0" indent="0">
               <a:buNone/>
             </a:pPr>
             <a:r>
@@ -11954,7 +12512,7 @@
           <a:bodyPr wrap="square" lIns="0" tIns="0" rIns="0" bIns="0" rtlCol="0" anchor="t"/>
           <a:lstStyle/>
           <a:p>
-            <a:pPr indent="0" marL="0">
+            <a:pPr marL="0" indent="0">
               <a:buNone/>
             </a:pPr>
             <a:r>
@@ -12104,6 +12662,13 @@
             <a:prstDash val="solid"/>
           </a:ln>
         </p:spPr>
+        <p:txBody>
+          <a:bodyPr/>
+          <a:lstStyle/>
+          <a:p>
+            <a:endParaRPr lang="es-PE"/>
+          </a:p>
+        </p:txBody>
       </p:sp>
       <p:sp>
         <p:nvSpPr>
@@ -12129,17 +12694,24 @@
             <a:prstDash val="solid"/>
           </a:ln>
         </p:spPr>
+        <p:txBody>
+          <a:bodyPr/>
+          <a:lstStyle/>
+          <a:p>
+            <a:endParaRPr lang="es-PE"/>
+          </a:p>
+        </p:txBody>
       </p:sp>
       <p:pic>
         <p:nvPicPr>
-          <p:cNvPr id="15" name="Image 1" descr="preencoded.png">    </p:cNvPr>
+          <p:cNvPr id="15" name="Image 1" descr="preencoded.png"/>
           <p:cNvPicPr>
             <a:picLocks noChangeAspect="1"/>
           </p:cNvPicPr>
           <p:nvPr/>
         </p:nvPicPr>
         <p:blipFill>
-          <a:blip r:embed="rId2"/>
+          <a:blip r:embed="rId4"/>
           <a:stretch>
             <a:fillRect/>
           </a:stretch>
@@ -12175,7 +12747,7 @@
           <a:bodyPr wrap="square" lIns="0" tIns="0" rIns="0" bIns="0" rtlCol="0" anchor="t"/>
           <a:lstStyle/>
           <a:p>
-            <a:pPr indent="0" marL="0">
+            <a:pPr marL="0" indent="0">
               <a:buNone/>
             </a:pPr>
             <a:r>
@@ -12214,7 +12786,7 @@
           <a:bodyPr wrap="square" lIns="0" tIns="0" rIns="0" bIns="0" rtlCol="0" anchor="t"/>
           <a:lstStyle/>
           <a:p>
-            <a:pPr indent="0" marL="0">
+            <a:pPr marL="0" indent="0">
               <a:buNone/>
             </a:pPr>
             <a:r>
@@ -12354,6 +12926,7 @@
         <a:solidFill>
           <a:srgbClr val="FFFFFF"/>
         </a:solidFill>
+        <a:effectLst/>
       </p:bgPr>
     </p:bg>
     <p:spTree>
@@ -12391,7 +12964,7 @@
           <a:bodyPr wrap="square" lIns="0" tIns="0" rIns="0" bIns="0" rtlCol="0" anchor="ctr"/>
           <a:lstStyle/>
           <a:p>
-            <a:pPr indent="0" marL="0">
+            <a:pPr marL="0" indent="0">
               <a:buNone/>
             </a:pPr>
             <a:r>
@@ -12435,6 +13008,13 @@
             <a:prstDash val="solid"/>
           </a:ln>
         </p:spPr>
+        <p:txBody>
+          <a:bodyPr/>
+          <a:lstStyle/>
+          <a:p>
+            <a:endParaRPr lang="es-PE"/>
+          </a:p>
+        </p:txBody>
       </p:sp>
       <p:sp>
         <p:nvSpPr>
@@ -12460,17 +13040,24 @@
             <a:prstDash val="solid"/>
           </a:ln>
         </p:spPr>
+        <p:txBody>
+          <a:bodyPr/>
+          <a:lstStyle/>
+          <a:p>
+            <a:endParaRPr lang="es-PE"/>
+          </a:p>
+        </p:txBody>
       </p:sp>
       <p:pic>
         <p:nvPicPr>
-          <p:cNvPr id="5" name="Image 0" descr="preencoded.png">    </p:cNvPr>
+          <p:cNvPr id="5" name="Image 0" descr="preencoded.png"/>
           <p:cNvPicPr>
             <a:picLocks noChangeAspect="1"/>
           </p:cNvPicPr>
           <p:nvPr/>
         </p:nvPicPr>
         <p:blipFill>
-          <a:blip r:embed="rId1"/>
+          <a:blip r:embed="rId3"/>
           <a:stretch>
             <a:fillRect/>
           </a:stretch>
@@ -12506,7 +13093,7 @@
           <a:bodyPr wrap="square" lIns="0" tIns="0" rIns="0" bIns="0" rtlCol="0" anchor="t"/>
           <a:lstStyle/>
           <a:p>
-            <a:pPr indent="0" marL="0">
+            <a:pPr marL="0" indent="0">
               <a:buNone/>
             </a:pPr>
             <a:r>
@@ -12545,7 +13132,7 @@
           <a:bodyPr wrap="square" lIns="0" tIns="0" rIns="0" bIns="0" rtlCol="0" anchor="t"/>
           <a:lstStyle/>
           <a:p>
-            <a:pPr indent="0" marL="0">
+            <a:pPr marL="0" indent="0">
               <a:buNone/>
             </a:pPr>
             <a:r>
@@ -12695,6 +13282,13 @@
             <a:prstDash val="solid"/>
           </a:ln>
         </p:spPr>
+        <p:txBody>
+          <a:bodyPr/>
+          <a:lstStyle/>
+          <a:p>
+            <a:endParaRPr lang="es-PE"/>
+          </a:p>
+        </p:txBody>
       </p:sp>
       <p:sp>
         <p:nvSpPr>
@@ -12720,17 +13314,24 @@
             <a:prstDash val="solid"/>
           </a:ln>
         </p:spPr>
+        <p:txBody>
+          <a:bodyPr/>
+          <a:lstStyle/>
+          <a:p>
+            <a:endParaRPr lang="es-PE"/>
+          </a:p>
+        </p:txBody>
       </p:sp>
       <p:pic>
         <p:nvPicPr>
-          <p:cNvPr id="11" name="Image 1" descr="preencoded.png">    </p:cNvPr>
+          <p:cNvPr id="11" name="Image 1" descr="preencoded.png"/>
           <p:cNvPicPr>
             <a:picLocks noChangeAspect="1"/>
           </p:cNvPicPr>
           <p:nvPr/>
         </p:nvPicPr>
         <p:blipFill>
-          <a:blip r:embed="rId2"/>
+          <a:blip r:embed="rId3"/>
           <a:stretch>
             <a:fillRect/>
           </a:stretch>
@@ -12766,7 +13367,7 @@
           <a:bodyPr wrap="square" lIns="0" tIns="0" rIns="0" bIns="0" rtlCol="0" anchor="t"/>
           <a:lstStyle/>
           <a:p>
-            <a:pPr indent="0" marL="0">
+            <a:pPr marL="0" indent="0">
               <a:buNone/>
             </a:pPr>
             <a:r>
@@ -12805,7 +13406,7 @@
           <a:bodyPr wrap="square" lIns="0" tIns="0" rIns="0" bIns="0" rtlCol="0" anchor="t"/>
           <a:lstStyle/>
           <a:p>
-            <a:pPr indent="0" marL="0">
+            <a:pPr marL="0" indent="0">
               <a:buNone/>
             </a:pPr>
             <a:r>
@@ -12955,6 +13556,13 @@
             <a:prstDash val="solid"/>
           </a:ln>
         </p:spPr>
+        <p:txBody>
+          <a:bodyPr/>
+          <a:lstStyle/>
+          <a:p>
+            <a:endParaRPr lang="es-PE"/>
+          </a:p>
+        </p:txBody>
       </p:sp>
       <p:sp>
         <p:nvSpPr>
@@ -12980,17 +13588,24 @@
             <a:prstDash val="solid"/>
           </a:ln>
         </p:spPr>
+        <p:txBody>
+          <a:bodyPr/>
+          <a:lstStyle/>
+          <a:p>
+            <a:endParaRPr lang="es-PE"/>
+          </a:p>
+        </p:txBody>
       </p:sp>
       <p:pic>
         <p:nvPicPr>
-          <p:cNvPr id="17" name="Image 2" descr="preencoded.png">    </p:cNvPr>
+          <p:cNvPr id="17" name="Image 2" descr="preencoded.png"/>
           <p:cNvPicPr>
             <a:picLocks noChangeAspect="1"/>
           </p:cNvPicPr>
           <p:nvPr/>
         </p:nvPicPr>
         <p:blipFill>
-          <a:blip r:embed="rId3"/>
+          <a:blip r:embed="rId4"/>
           <a:stretch>
             <a:fillRect/>
           </a:stretch>
@@ -13026,7 +13641,7 @@
           <a:bodyPr wrap="square" lIns="0" tIns="0" rIns="0" bIns="0" rtlCol="0" anchor="t"/>
           <a:lstStyle/>
           <a:p>
-            <a:pPr indent="0" marL="0">
+            <a:pPr marL="0" indent="0">
               <a:buNone/>
             </a:pPr>
             <a:r>
@@ -13065,7 +13680,7 @@
           <a:bodyPr wrap="square" lIns="0" tIns="0" rIns="0" bIns="0" rtlCol="0" anchor="t"/>
           <a:lstStyle/>
           <a:p>
-            <a:pPr indent="0" marL="0">
+            <a:pPr marL="0" indent="0">
               <a:buNone/>
             </a:pPr>
             <a:r>
@@ -13099,6 +13714,7 @@
         <a:solidFill>
           <a:srgbClr val="FFFFFF"/>
         </a:solidFill>
+        <a:effectLst/>
       </p:bgPr>
     </p:bg>
     <p:spTree>
@@ -13136,7 +13752,7 @@
           <a:bodyPr wrap="square" lIns="0" tIns="0" rIns="0" bIns="0" rtlCol="0" anchor="ctr"/>
           <a:lstStyle/>
           <a:p>
-            <a:pPr indent="0" marL="0">
+            <a:pPr marL="0" indent="0">
               <a:buNone/>
             </a:pPr>
             <a:r>
@@ -13176,6 +13792,13 @@
             <a:prstDash val="solid"/>
           </a:ln>
         </p:spPr>
+        <p:txBody>
+          <a:bodyPr/>
+          <a:lstStyle/>
+          <a:p>
+            <a:endParaRPr lang="es-PE"/>
+          </a:p>
+        </p:txBody>
       </p:sp>
       <p:sp>
         <p:nvSpPr>
@@ -13201,6 +13824,13 @@
             <a:prstDash val="solid"/>
           </a:ln>
         </p:spPr>
+        <p:txBody>
+          <a:bodyPr/>
+          <a:lstStyle/>
+          <a:p>
+            <a:endParaRPr lang="es-PE"/>
+          </a:p>
+        </p:txBody>
       </p:sp>
       <p:sp>
         <p:nvSpPr>
@@ -13223,7 +13853,7 @@
           <a:bodyPr wrap="square" lIns="0" tIns="0" rIns="0" bIns="0" rtlCol="0" anchor="ctr"/>
           <a:lstStyle/>
           <a:p>
-            <a:pPr algn="ctr" indent="0" marL="0">
+            <a:pPr marL="0" indent="0" algn="ctr">
               <a:buNone/>
             </a:pPr>
             <a:r>
@@ -13262,7 +13892,7 @@
           <a:bodyPr wrap="square" lIns="0" tIns="0" rIns="0" bIns="0" rtlCol="0" anchor="t"/>
           <a:lstStyle/>
           <a:p>
-            <a:pPr algn="ctr" indent="0" marL="0">
+            <a:pPr marL="0" indent="0" algn="ctr">
               <a:buNone/>
             </a:pPr>
             <a:r>
@@ -13301,7 +13931,7 @@
           <a:bodyPr wrap="square" lIns="0" tIns="0" rIns="0" bIns="0" rtlCol="0" anchor="t"/>
           <a:lstStyle/>
           <a:p>
-            <a:pPr algn="ctr" indent="0" marL="0">
+            <a:pPr marL="0" indent="0" algn="ctr">
               <a:buNone/>
             </a:pPr>
             <a:r>
@@ -13343,6 +13973,13 @@
             <a:prstDash val="solid"/>
           </a:ln>
         </p:spPr>
+        <p:txBody>
+          <a:bodyPr/>
+          <a:lstStyle/>
+          <a:p>
+            <a:endParaRPr lang="es-PE"/>
+          </a:p>
+        </p:txBody>
       </p:sp>
       <p:sp>
         <p:nvSpPr>
@@ -13365,7 +14002,7 @@
           <a:bodyPr wrap="square" lIns="0" tIns="0" rIns="0" bIns="0" rtlCol="0" anchor="ctr"/>
           <a:lstStyle/>
           <a:p>
-            <a:pPr algn="ctr" indent="0" marL="0">
+            <a:pPr marL="0" indent="0" algn="ctr">
               <a:buNone/>
             </a:pPr>
             <a:r>
@@ -13404,7 +14041,7 @@
           <a:bodyPr wrap="square" lIns="0" tIns="0" rIns="0" bIns="0" rtlCol="0" anchor="t"/>
           <a:lstStyle/>
           <a:p>
-            <a:pPr algn="ctr" indent="0" marL="0">
+            <a:pPr marL="0" indent="0" algn="ctr">
               <a:buNone/>
             </a:pPr>
             <a:r>
@@ -13443,7 +14080,7 @@
           <a:bodyPr wrap="square" lIns="0" tIns="0" rIns="0" bIns="0" rtlCol="0" anchor="t"/>
           <a:lstStyle/>
           <a:p>
-            <a:pPr algn="ctr" indent="0" marL="0">
+            <a:pPr marL="0" indent="0" algn="ctr">
               <a:buNone/>
             </a:pPr>
             <a:r>
@@ -13485,6 +14122,13 @@
             <a:prstDash val="solid"/>
           </a:ln>
         </p:spPr>
+        <p:txBody>
+          <a:bodyPr/>
+          <a:lstStyle/>
+          <a:p>
+            <a:endParaRPr lang="es-PE"/>
+          </a:p>
+        </p:txBody>
       </p:sp>
       <p:sp>
         <p:nvSpPr>
@@ -13507,7 +14151,7 @@
           <a:bodyPr wrap="square" lIns="0" tIns="0" rIns="0" bIns="0" rtlCol="0" anchor="ctr"/>
           <a:lstStyle/>
           <a:p>
-            <a:pPr algn="ctr" indent="0" marL="0">
+            <a:pPr marL="0" indent="0" algn="ctr">
               <a:buNone/>
             </a:pPr>
             <a:r>
@@ -13546,7 +14190,7 @@
           <a:bodyPr wrap="square" lIns="0" tIns="0" rIns="0" bIns="0" rtlCol="0" anchor="t"/>
           <a:lstStyle/>
           <a:p>
-            <a:pPr algn="ctr" indent="0" marL="0">
+            <a:pPr marL="0" indent="0" algn="ctr">
               <a:buNone/>
             </a:pPr>
             <a:r>
@@ -13585,7 +14229,7 @@
           <a:bodyPr wrap="square" lIns="0" tIns="0" rIns="0" bIns="0" rtlCol="0" anchor="t"/>
           <a:lstStyle/>
           <a:p>
-            <a:pPr algn="ctr" indent="0" marL="0">
+            <a:pPr marL="0" indent="0" algn="ctr">
               <a:buNone/>
             </a:pPr>
             <a:r>
@@ -13627,6 +14271,13 @@
             <a:prstDash val="solid"/>
           </a:ln>
         </p:spPr>
+        <p:txBody>
+          <a:bodyPr/>
+          <a:lstStyle/>
+          <a:p>
+            <a:endParaRPr lang="es-PE"/>
+          </a:p>
+        </p:txBody>
       </p:sp>
       <p:sp>
         <p:nvSpPr>
@@ -13649,7 +14300,7 @@
           <a:bodyPr wrap="square" lIns="0" tIns="0" rIns="0" bIns="0" rtlCol="0" anchor="ctr"/>
           <a:lstStyle/>
           <a:p>
-            <a:pPr algn="ctr" indent="0" marL="0">
+            <a:pPr marL="0" indent="0" algn="ctr">
               <a:buNone/>
             </a:pPr>
             <a:r>
@@ -13688,7 +14339,7 @@
           <a:bodyPr wrap="square" lIns="0" tIns="0" rIns="0" bIns="0" rtlCol="0" anchor="t"/>
           <a:lstStyle/>
           <a:p>
-            <a:pPr algn="ctr" indent="0" marL="0">
+            <a:pPr marL="0" indent="0" algn="ctr">
               <a:buNone/>
             </a:pPr>
             <a:r>
@@ -13727,7 +14378,7 @@
           <a:bodyPr wrap="square" lIns="0" tIns="0" rIns="0" bIns="0" rtlCol="0" anchor="t"/>
           <a:lstStyle/>
           <a:p>
-            <a:pPr algn="ctr" indent="0" marL="0">
+            <a:pPr marL="0" indent="0" algn="ctr">
               <a:buNone/>
             </a:pPr>
             <a:r>
@@ -13769,6 +14420,13 @@
             <a:prstDash val="solid"/>
           </a:ln>
         </p:spPr>
+        <p:txBody>
+          <a:bodyPr/>
+          <a:lstStyle/>
+          <a:p>
+            <a:endParaRPr lang="es-PE"/>
+          </a:p>
+        </p:txBody>
       </p:sp>
       <p:sp>
         <p:nvSpPr>
@@ -13791,7 +14449,7 @@
           <a:bodyPr wrap="square" lIns="0" tIns="0" rIns="0" bIns="0" rtlCol="0" anchor="ctr"/>
           <a:lstStyle/>
           <a:p>
-            <a:pPr algn="ctr" indent="0" marL="0">
+            <a:pPr marL="0" indent="0" algn="ctr">
               <a:buNone/>
             </a:pPr>
             <a:r>
@@ -13830,7 +14488,7 @@
           <a:bodyPr wrap="square" lIns="0" tIns="0" rIns="0" bIns="0" rtlCol="0" anchor="t"/>
           <a:lstStyle/>
           <a:p>
-            <a:pPr algn="ctr" indent="0" marL="0">
+            <a:pPr marL="0" indent="0" algn="ctr">
               <a:buNone/>
             </a:pPr>
             <a:r>
@@ -13869,7 +14527,7 @@
           <a:bodyPr wrap="square" lIns="0" tIns="0" rIns="0" bIns="0" rtlCol="0" anchor="t"/>
           <a:lstStyle/>
           <a:p>
-            <a:pPr algn="ctr" indent="0" marL="0">
+            <a:pPr marL="0" indent="0" algn="ctr">
               <a:buNone/>
             </a:pPr>
             <a:r>
@@ -13911,6 +14569,13 @@
             <a:prstDash val="solid"/>
           </a:ln>
         </p:spPr>
+        <p:txBody>
+          <a:bodyPr/>
+          <a:lstStyle/>
+          <a:p>
+            <a:endParaRPr lang="es-PE"/>
+          </a:p>
+        </p:txBody>
       </p:sp>
       <p:sp>
         <p:nvSpPr>
@@ -13933,7 +14598,7 @@
           <a:bodyPr wrap="square" lIns="0" tIns="0" rIns="0" bIns="0" rtlCol="0" anchor="ctr"/>
           <a:lstStyle/>
           <a:p>
-            <a:pPr algn="ctr" indent="0" marL="0">
+            <a:pPr marL="0" indent="0" algn="ctr">
               <a:buNone/>
             </a:pPr>
             <a:r>
@@ -13972,7 +14637,7 @@
           <a:bodyPr wrap="square" lIns="0" tIns="0" rIns="0" bIns="0" rtlCol="0" anchor="t"/>
           <a:lstStyle/>
           <a:p>
-            <a:pPr algn="ctr" indent="0" marL="0">
+            <a:pPr marL="0" indent="0" algn="ctr">
               <a:buNone/>
             </a:pPr>
             <a:r>
@@ -14011,7 +14676,7 @@
           <a:bodyPr wrap="square" lIns="0" tIns="0" rIns="0" bIns="0" rtlCol="0" anchor="t"/>
           <a:lstStyle/>
           <a:p>
-            <a:pPr algn="ctr" indent="0" marL="0">
+            <a:pPr marL="0" indent="0" algn="ctr">
               <a:buNone/>
             </a:pPr>
             <a:r>
@@ -14055,6 +14720,13 @@
             <a:prstDash val="solid"/>
           </a:ln>
         </p:spPr>
+        <p:txBody>
+          <a:bodyPr/>
+          <a:lstStyle/>
+          <a:p>
+            <a:endParaRPr lang="es-PE"/>
+          </a:p>
+        </p:txBody>
       </p:sp>
       <p:sp>
         <p:nvSpPr>
@@ -14077,7 +14749,7 @@
           <a:bodyPr wrap="square" lIns="0" tIns="0" rIns="0" bIns="0" rtlCol="0" anchor="ctr"/>
           <a:lstStyle/>
           <a:p>
-            <a:pPr indent="0" marL="0">
+            <a:pPr marL="0" indent="0">
               <a:buNone/>
             </a:pPr>
             <a:r>
@@ -14396,4 +15068,319 @@
     </a:ext>
   </a:extLst>
 </a:theme>
+</file>
+
+<file path=ppt/theme/theme2.xml><?xml version="1.0" encoding="utf-8"?>
+<a:theme xmlns:a="http://schemas.openxmlformats.org/drawingml/2006/main" name="Office Theme">
+  <a:themeElements>
+    <a:clrScheme name="Office">
+      <a:dk1>
+        <a:sysClr val="windowText" lastClr="000000"/>
+      </a:dk1>
+      <a:lt1>
+        <a:sysClr val="window" lastClr="FFFFFF"/>
+      </a:lt1>
+      <a:dk2>
+        <a:srgbClr val="0E2841"/>
+      </a:dk2>
+      <a:lt2>
+        <a:srgbClr val="E8E8E8"/>
+      </a:lt2>
+      <a:accent1>
+        <a:srgbClr val="156082"/>
+      </a:accent1>
+      <a:accent2>
+        <a:srgbClr val="E97132"/>
+      </a:accent2>
+      <a:accent3>
+        <a:srgbClr val="196B24"/>
+      </a:accent3>
+      <a:accent4>
+        <a:srgbClr val="0F9ED5"/>
+      </a:accent4>
+      <a:accent5>
+        <a:srgbClr val="A02B93"/>
+      </a:accent5>
+      <a:accent6>
+        <a:srgbClr val="4EA72E"/>
+      </a:accent6>
+      <a:hlink>
+        <a:srgbClr val="467886"/>
+      </a:hlink>
+      <a:folHlink>
+        <a:srgbClr val="96607D"/>
+      </a:folHlink>
+    </a:clrScheme>
+    <a:fontScheme name="Office">
+      <a:majorFont>
+        <a:latin typeface="Aptos Display" panose="02110004020202020204"/>
+        <a:ea typeface=""/>
+        <a:cs typeface=""/>
+        <a:font script="Jpan" typeface="游ゴシック Light"/>
+        <a:font script="Hang" typeface="맑은 고딕"/>
+        <a:font script="Hans" typeface="等线 Light"/>
+        <a:font script="Hant" typeface="新細明體"/>
+        <a:font script="Arab" typeface="Times New Roman"/>
+        <a:font script="Hebr" typeface="Times New Roman"/>
+        <a:font script="Thai" typeface="Angsana New"/>
+        <a:font script="Ethi" typeface="Nyala"/>
+        <a:font script="Beng" typeface="Vrinda"/>
+        <a:font script="Gujr" typeface="Shruti"/>
+        <a:font script="Khmr" typeface="MoolBoran"/>
+        <a:font script="Knda" typeface="Tunga"/>
+        <a:font script="Guru" typeface="Raavi"/>
+        <a:font script="Cans" typeface="Euphemia"/>
+        <a:font script="Cher" typeface="Plantagenet Cherokee"/>
+        <a:font script="Yiii" typeface="Microsoft Yi Baiti"/>
+        <a:font script="Tibt" typeface="Microsoft Himalaya"/>
+        <a:font script="Thaa" typeface="MV Boli"/>
+        <a:font script="Deva" typeface="Mangal"/>
+        <a:font script="Telu" typeface="Gautami"/>
+        <a:font script="Taml" typeface="Latha"/>
+        <a:font script="Syrc" typeface="Estrangelo Edessa"/>
+        <a:font script="Orya" typeface="Kalinga"/>
+        <a:font script="Mlym" typeface="Kartika"/>
+        <a:font script="Laoo" typeface="DokChampa"/>
+        <a:font script="Sinh" typeface="Iskoola Pota"/>
+        <a:font script="Mong" typeface="Mongolian Baiti"/>
+        <a:font script="Viet" typeface="Times New Roman"/>
+        <a:font script="Uigh" typeface="Microsoft Uighur"/>
+        <a:font script="Geor" typeface="Sylfaen"/>
+        <a:font script="Armn" typeface="Arial"/>
+        <a:font script="Bugi" typeface="Leelawadee UI"/>
+        <a:font script="Bopo" typeface="Microsoft JhengHei"/>
+        <a:font script="Java" typeface="Javanese Text"/>
+        <a:font script="Lisu" typeface="Segoe UI"/>
+        <a:font script="Mymr" typeface="Myanmar Text"/>
+        <a:font script="Nkoo" typeface="Ebrima"/>
+        <a:font script="Olck" typeface="Nirmala UI"/>
+        <a:font script="Osma" typeface="Ebrima"/>
+        <a:font script="Phag" typeface="Phagspa"/>
+        <a:font script="Syrn" typeface="Estrangelo Edessa"/>
+        <a:font script="Syrj" typeface="Estrangelo Edessa"/>
+        <a:font script="Syre" typeface="Estrangelo Edessa"/>
+        <a:font script="Sora" typeface="Nirmala UI"/>
+        <a:font script="Tale" typeface="Microsoft Tai Le"/>
+        <a:font script="Talu" typeface="Microsoft New Tai Lue"/>
+        <a:font script="Tfng" typeface="Ebrima"/>
+      </a:majorFont>
+      <a:minorFont>
+        <a:latin typeface="Aptos" panose="02110004020202020204"/>
+        <a:ea typeface=""/>
+        <a:cs typeface=""/>
+        <a:font script="Jpan" typeface="游ゴシック"/>
+        <a:font script="Hang" typeface="맑은 고딕"/>
+        <a:font script="Hans" typeface="等线"/>
+        <a:font script="Hant" typeface="新細明體"/>
+        <a:font script="Arab" typeface="Arial"/>
+        <a:font script="Hebr" typeface="Arial"/>
+        <a:font script="Thai" typeface="Cordia New"/>
+        <a:font script="Ethi" typeface="Nyala"/>
+        <a:font script="Beng" typeface="Vrinda"/>
+        <a:font script="Gujr" typeface="Shruti"/>
+        <a:font script="Khmr" typeface="DaunPenh"/>
+        <a:font script="Knda" typeface="Tunga"/>
+        <a:font script="Guru" typeface="Raavi"/>
+        <a:font script="Cans" typeface="Euphemia"/>
+        <a:font script="Cher" typeface="Plantagenet Cherokee"/>
+        <a:font script="Yiii" typeface="Microsoft Yi Baiti"/>
+        <a:font script="Tibt" typeface="Microsoft Himalaya"/>
+        <a:font script="Thaa" typeface="MV Boli"/>
+        <a:font script="Deva" typeface="Mangal"/>
+        <a:font script="Telu" typeface="Gautami"/>
+        <a:font script="Taml" typeface="Latha"/>
+        <a:font script="Syrc" typeface="Estrangelo Edessa"/>
+        <a:font script="Orya" typeface="Kalinga"/>
+        <a:font script="Mlym" typeface="Kartika"/>
+        <a:font script="Laoo" typeface="DokChampa"/>
+        <a:font script="Sinh" typeface="Iskoola Pota"/>
+        <a:font script="Mong" typeface="Mongolian Baiti"/>
+        <a:font script="Viet" typeface="Arial"/>
+        <a:font script="Uigh" typeface="Microsoft Uighur"/>
+        <a:font script="Geor" typeface="Sylfaen"/>
+        <a:font script="Armn" typeface="Arial"/>
+        <a:font script="Bugi" typeface="Leelawadee UI"/>
+        <a:font script="Bopo" typeface="Microsoft JhengHei"/>
+        <a:font script="Java" typeface="Javanese Text"/>
+        <a:font script="Lisu" typeface="Segoe UI"/>
+        <a:font script="Mymr" typeface="Myanmar Text"/>
+        <a:font script="Nkoo" typeface="Ebrima"/>
+        <a:font script="Olck" typeface="Nirmala UI"/>
+        <a:font script="Osma" typeface="Ebrima"/>
+        <a:font script="Phag" typeface="Phagspa"/>
+        <a:font script="Syrn" typeface="Estrangelo Edessa"/>
+        <a:font script="Syrj" typeface="Estrangelo Edessa"/>
+        <a:font script="Syre" typeface="Estrangelo Edessa"/>
+        <a:font script="Sora" typeface="Nirmala UI"/>
+        <a:font script="Tale" typeface="Microsoft Tai Le"/>
+        <a:font script="Talu" typeface="Microsoft New Tai Lue"/>
+        <a:font script="Tfng" typeface="Ebrima"/>
+      </a:minorFont>
+    </a:fontScheme>
+    <a:fmtScheme name="Office">
+      <a:fillStyleLst>
+        <a:solidFill>
+          <a:schemeClr val="phClr"/>
+        </a:solidFill>
+        <a:gradFill rotWithShape="1">
+          <a:gsLst>
+            <a:gs pos="0">
+              <a:schemeClr val="phClr">
+                <a:lumMod val="110000"/>
+                <a:satMod val="105000"/>
+                <a:tint val="67000"/>
+              </a:schemeClr>
+            </a:gs>
+            <a:gs pos="50000">
+              <a:schemeClr val="phClr">
+                <a:lumMod val="105000"/>
+                <a:satMod val="103000"/>
+                <a:tint val="73000"/>
+              </a:schemeClr>
+            </a:gs>
+            <a:gs pos="100000">
+              <a:schemeClr val="phClr">
+                <a:lumMod val="105000"/>
+                <a:satMod val="109000"/>
+                <a:tint val="81000"/>
+              </a:schemeClr>
+            </a:gs>
+          </a:gsLst>
+          <a:lin ang="5400000" scaled="0"/>
+        </a:gradFill>
+        <a:gradFill rotWithShape="1">
+          <a:gsLst>
+            <a:gs pos="0">
+              <a:schemeClr val="phClr">
+                <a:satMod val="103000"/>
+                <a:lumMod val="102000"/>
+                <a:tint val="94000"/>
+              </a:schemeClr>
+            </a:gs>
+            <a:gs pos="50000">
+              <a:schemeClr val="phClr">
+                <a:satMod val="110000"/>
+                <a:lumMod val="100000"/>
+                <a:shade val="100000"/>
+              </a:schemeClr>
+            </a:gs>
+            <a:gs pos="100000">
+              <a:schemeClr val="phClr">
+                <a:lumMod val="99000"/>
+                <a:satMod val="120000"/>
+                <a:shade val="78000"/>
+              </a:schemeClr>
+            </a:gs>
+          </a:gsLst>
+          <a:lin ang="5400000" scaled="0"/>
+        </a:gradFill>
+      </a:fillStyleLst>
+      <a:lnStyleLst>
+        <a:ln w="12700" cap="flat" cmpd="sng" algn="ctr">
+          <a:solidFill>
+            <a:schemeClr val="phClr"/>
+          </a:solidFill>
+          <a:prstDash val="solid"/>
+          <a:miter lim="800000"/>
+        </a:ln>
+        <a:ln w="19050" cap="flat" cmpd="sng" algn="ctr">
+          <a:solidFill>
+            <a:schemeClr val="phClr"/>
+          </a:solidFill>
+          <a:prstDash val="solid"/>
+          <a:miter lim="800000"/>
+        </a:ln>
+        <a:ln w="25400" cap="flat" cmpd="sng" algn="ctr">
+          <a:solidFill>
+            <a:schemeClr val="phClr"/>
+          </a:solidFill>
+          <a:prstDash val="solid"/>
+          <a:miter lim="800000"/>
+        </a:ln>
+      </a:lnStyleLst>
+      <a:effectStyleLst>
+        <a:effectStyle>
+          <a:effectLst/>
+        </a:effectStyle>
+        <a:effectStyle>
+          <a:effectLst/>
+        </a:effectStyle>
+        <a:effectStyle>
+          <a:effectLst>
+            <a:outerShdw blurRad="57150" dist="19050" dir="5400000" algn="ctr" rotWithShape="0">
+              <a:srgbClr val="000000">
+                <a:alpha val="63000"/>
+              </a:srgbClr>
+            </a:outerShdw>
+          </a:effectLst>
+        </a:effectStyle>
+      </a:effectStyleLst>
+      <a:bgFillStyleLst>
+        <a:solidFill>
+          <a:schemeClr val="phClr"/>
+        </a:solidFill>
+        <a:solidFill>
+          <a:schemeClr val="phClr">
+            <a:tint val="95000"/>
+            <a:satMod val="170000"/>
+          </a:schemeClr>
+        </a:solidFill>
+        <a:gradFill rotWithShape="1">
+          <a:gsLst>
+            <a:gs pos="0">
+              <a:schemeClr val="phClr">
+                <a:tint val="93000"/>
+                <a:satMod val="150000"/>
+                <a:shade val="98000"/>
+                <a:lumMod val="102000"/>
+              </a:schemeClr>
+            </a:gs>
+            <a:gs pos="50000">
+              <a:schemeClr val="phClr">
+                <a:tint val="98000"/>
+                <a:satMod val="130000"/>
+                <a:shade val="90000"/>
+                <a:lumMod val="103000"/>
+              </a:schemeClr>
+            </a:gs>
+            <a:gs pos="100000">
+              <a:schemeClr val="phClr">
+                <a:shade val="63000"/>
+                <a:satMod val="120000"/>
+              </a:schemeClr>
+            </a:gs>
+          </a:gsLst>
+          <a:lin ang="5400000" scaled="0"/>
+        </a:gradFill>
+      </a:bgFillStyleLst>
+    </a:fmtScheme>
+  </a:themeElements>
+  <a:objectDefaults>
+    <a:lnDef>
+      <a:spPr/>
+      <a:bodyPr/>
+      <a:lstStyle/>
+      <a:style>
+        <a:lnRef idx="2">
+          <a:schemeClr val="accent1"/>
+        </a:lnRef>
+        <a:fillRef idx="0">
+          <a:schemeClr val="accent1"/>
+        </a:fillRef>
+        <a:effectRef idx="1">
+          <a:schemeClr val="accent1"/>
+        </a:effectRef>
+        <a:fontRef idx="minor">
+          <a:schemeClr val="tx1"/>
+        </a:fontRef>
+      </a:style>
+    </a:lnDef>
+  </a:objectDefaults>
+  <a:extraClrSchemeLst/>
+  <a:extLst>
+    <a:ext uri="{05A4C25C-085E-4340-85A3-A5531E510DB2}">
+      <thm15:themeFamily xmlns:thm15="http://schemas.microsoft.com/office/thememl/2012/main" name="Office Theme" id="{2E142A2C-CD16-42D6-873A-C26D2A0506FA}" vid="{1BDDFF52-6CD6-40A5-AB3C-68EB2F1E4D0A}"/>
+    </a:ext>
+  </a:extLst>
+</a:theme>
 </file>